--- a/exports/pptx/lessons/middle-module-14-magic-squares/day-01-what-is-a-magic-square.pptx
+++ b/exports/pptx/lessons/middle-module-14-magic-squares/day-01-what-is-a-magic-square.pptx
@@ -18,9 +18,13 @@
     <p:sldId id="266" r:id="rId12"/>
     <p:sldId id="267" r:id="rId13"/>
     <p:sldId id="268" r:id="rId14"/>
+    <p:sldId id="269" r:id="rId15"/>
+    <p:sldId id="270" r:id="rId16"/>
+    <p:sldId id="271" r:id="rId17"/>
+    <p:sldId id="272" r:id="rId18"/>
   </p:sldIdLst>
   <p:notesMasterIdLst>
-    <p:notesMasterId r:id="rId15"/>
+    <p:notesMasterId r:id="rId19"/>
   </p:notesMasterIdLst>
   <p:sldSz cx="9144000" cy="5143500"/>
   <p:notesSz cx="5143500" cy="9144000"/>
@@ -890,6 +894,358 @@
             <a:fld id="{F7021451-1387-4CA6-816F-3879F97B5CBC}" type="slidenum">
               <a:rPr lang="en-US"/>
               <a:t>13</a:t>
+            </a:fld>
+            <a:endParaRPr lang="en-US"/>
+          </a:p>
+        </p:txBody>
+      </p:sp>
+    </p:spTree>
+    <p:extLst>
+      <p:ext uri="{BB962C8B-B14F-4D97-AF65-F5344CB8AC3E}">
+        <p14:creationId xmlns:p14="http://schemas.microsoft.com/office/powerpoint/2010/main" val="1024086991"/>
+      </p:ext>
+    </p:extLst>
+  </p:cSld>
+  <p:clrMapOvr>
+    <a:masterClrMapping/>
+  </p:clrMapOvr>
+</p:notes>
+</file>
+
+<file path=ppt/notesSlides/notesSlide14.xml><?xml version="1.0" encoding="utf-8"?>
+<p:notes xmlns:a="http://schemas.openxmlformats.org/drawingml/2006/main" xmlns:r="http://schemas.openxmlformats.org/officeDocument/2006/relationships" xmlns:p="http://schemas.openxmlformats.org/presentationml/2006/main">
+  <p:cSld>
+    <p:spTree>
+      <p:nvGrpSpPr>
+        <p:cNvPr id="1" name=""/>
+        <p:cNvGrpSpPr/>
+        <p:nvPr/>
+      </p:nvGrpSpPr>
+      <p:grpSpPr>
+        <a:xfrm>
+          <a:off x="0" y="0"/>
+          <a:ext cx="0" cy="0"/>
+          <a:chOff x="0" y="0"/>
+          <a:chExt cx="0" cy="0"/>
+        </a:xfrm>
+      </p:grpSpPr>
+      <p:sp>
+        <p:nvSpPr>
+          <p:cNvPr id="2" name="Slide Image Placeholder 1"/>
+          <p:cNvSpPr>
+            <a:spLocks noGrp="1" noRot="1" noChangeAspect="1"/>
+          </p:cNvSpPr>
+          <p:nvPr>
+            <p:ph type="sldImg"/>
+          </p:nvPr>
+        </p:nvSpPr>
+        <p:spPr/>
+      </p:sp>
+      <p:sp>
+        <p:nvSpPr>
+          <p:cNvPr id="3" name="Notes Placeholder 2"/>
+          <p:cNvSpPr>
+            <a:spLocks noGrp="1"/>
+          </p:cNvSpPr>
+          <p:nvPr>
+            <p:ph type="body" idx="1"/>
+          </p:nvPr>
+        </p:nvSpPr>
+        <p:spPr/>
+        <p:txBody>
+          <a:bodyPr/>
+          <a:lstStyle/>
+          <a:p>
+            <a:r>
+              <a:rPr lang="en-US" dirty="0"/>
+              <a:t/>
+            </a:r>
+            <a:endParaRPr lang="en-US" dirty="0"/>
+          </a:p>
+        </p:txBody>
+      </p:sp>
+      <p:sp>
+        <p:nvSpPr>
+          <p:cNvPr id="4" name="Slide Number Placeholder 3"/>
+          <p:cNvSpPr>
+            <a:spLocks noGrp="1"/>
+          </p:cNvSpPr>
+          <p:nvPr>
+            <p:ph type="sldNum" sz="quarter" idx="10"/>
+          </p:nvPr>
+        </p:nvSpPr>
+        <p:spPr/>
+        <p:txBody>
+          <a:bodyPr/>
+          <a:lstStyle/>
+          <a:p>
+            <a:fld id="{F7021451-1387-4CA6-816F-3879F97B5CBC}" type="slidenum">
+              <a:rPr lang="en-US"/>
+              <a:t>14</a:t>
+            </a:fld>
+            <a:endParaRPr lang="en-US"/>
+          </a:p>
+        </p:txBody>
+      </p:sp>
+    </p:spTree>
+    <p:extLst>
+      <p:ext uri="{BB962C8B-B14F-4D97-AF65-F5344CB8AC3E}">
+        <p14:creationId xmlns:p14="http://schemas.microsoft.com/office/powerpoint/2010/main" val="1024086991"/>
+      </p:ext>
+    </p:extLst>
+  </p:cSld>
+  <p:clrMapOvr>
+    <a:masterClrMapping/>
+  </p:clrMapOvr>
+</p:notes>
+</file>
+
+<file path=ppt/notesSlides/notesSlide15.xml><?xml version="1.0" encoding="utf-8"?>
+<p:notes xmlns:a="http://schemas.openxmlformats.org/drawingml/2006/main" xmlns:r="http://schemas.openxmlformats.org/officeDocument/2006/relationships" xmlns:p="http://schemas.openxmlformats.org/presentationml/2006/main">
+  <p:cSld>
+    <p:spTree>
+      <p:nvGrpSpPr>
+        <p:cNvPr id="1" name=""/>
+        <p:cNvGrpSpPr/>
+        <p:nvPr/>
+      </p:nvGrpSpPr>
+      <p:grpSpPr>
+        <a:xfrm>
+          <a:off x="0" y="0"/>
+          <a:ext cx="0" cy="0"/>
+          <a:chOff x="0" y="0"/>
+          <a:chExt cx="0" cy="0"/>
+        </a:xfrm>
+      </p:grpSpPr>
+      <p:sp>
+        <p:nvSpPr>
+          <p:cNvPr id="2" name="Slide Image Placeholder 1"/>
+          <p:cNvSpPr>
+            <a:spLocks noGrp="1" noRot="1" noChangeAspect="1"/>
+          </p:cNvSpPr>
+          <p:nvPr>
+            <p:ph type="sldImg"/>
+          </p:nvPr>
+        </p:nvSpPr>
+        <p:spPr/>
+      </p:sp>
+      <p:sp>
+        <p:nvSpPr>
+          <p:cNvPr id="3" name="Notes Placeholder 2"/>
+          <p:cNvSpPr>
+            <a:spLocks noGrp="1"/>
+          </p:cNvSpPr>
+          <p:nvPr>
+            <p:ph type="body" idx="1"/>
+          </p:nvPr>
+        </p:nvSpPr>
+        <p:spPr/>
+        <p:txBody>
+          <a:bodyPr/>
+          <a:lstStyle/>
+          <a:p>
+            <a:r>
+              <a:rPr lang="en-US" dirty="0"/>
+              <a:t/>
+            </a:r>
+            <a:endParaRPr lang="en-US" dirty="0"/>
+          </a:p>
+        </p:txBody>
+      </p:sp>
+      <p:sp>
+        <p:nvSpPr>
+          <p:cNvPr id="4" name="Slide Number Placeholder 3"/>
+          <p:cNvSpPr>
+            <a:spLocks noGrp="1"/>
+          </p:cNvSpPr>
+          <p:nvPr>
+            <p:ph type="sldNum" sz="quarter" idx="10"/>
+          </p:nvPr>
+        </p:nvSpPr>
+        <p:spPr/>
+        <p:txBody>
+          <a:bodyPr/>
+          <a:lstStyle/>
+          <a:p>
+            <a:fld id="{F7021451-1387-4CA6-816F-3879F97B5CBC}" type="slidenum">
+              <a:rPr lang="en-US"/>
+              <a:t>15</a:t>
+            </a:fld>
+            <a:endParaRPr lang="en-US"/>
+          </a:p>
+        </p:txBody>
+      </p:sp>
+    </p:spTree>
+    <p:extLst>
+      <p:ext uri="{BB962C8B-B14F-4D97-AF65-F5344CB8AC3E}">
+        <p14:creationId xmlns:p14="http://schemas.microsoft.com/office/powerpoint/2010/main" val="1024086991"/>
+      </p:ext>
+    </p:extLst>
+  </p:cSld>
+  <p:clrMapOvr>
+    <a:masterClrMapping/>
+  </p:clrMapOvr>
+</p:notes>
+</file>
+
+<file path=ppt/notesSlides/notesSlide16.xml><?xml version="1.0" encoding="utf-8"?>
+<p:notes xmlns:a="http://schemas.openxmlformats.org/drawingml/2006/main" xmlns:r="http://schemas.openxmlformats.org/officeDocument/2006/relationships" xmlns:p="http://schemas.openxmlformats.org/presentationml/2006/main">
+  <p:cSld>
+    <p:spTree>
+      <p:nvGrpSpPr>
+        <p:cNvPr id="1" name=""/>
+        <p:cNvGrpSpPr/>
+        <p:nvPr/>
+      </p:nvGrpSpPr>
+      <p:grpSpPr>
+        <a:xfrm>
+          <a:off x="0" y="0"/>
+          <a:ext cx="0" cy="0"/>
+          <a:chOff x="0" y="0"/>
+          <a:chExt cx="0" cy="0"/>
+        </a:xfrm>
+      </p:grpSpPr>
+      <p:sp>
+        <p:nvSpPr>
+          <p:cNvPr id="2" name="Slide Image Placeholder 1"/>
+          <p:cNvSpPr>
+            <a:spLocks noGrp="1" noRot="1" noChangeAspect="1"/>
+          </p:cNvSpPr>
+          <p:nvPr>
+            <p:ph type="sldImg"/>
+          </p:nvPr>
+        </p:nvSpPr>
+        <p:spPr/>
+      </p:sp>
+      <p:sp>
+        <p:nvSpPr>
+          <p:cNvPr id="3" name="Notes Placeholder 2"/>
+          <p:cNvSpPr>
+            <a:spLocks noGrp="1"/>
+          </p:cNvSpPr>
+          <p:nvPr>
+            <p:ph type="body" idx="1"/>
+          </p:nvPr>
+        </p:nvSpPr>
+        <p:spPr/>
+        <p:txBody>
+          <a:bodyPr/>
+          <a:lstStyle/>
+          <a:p>
+            <a:r>
+              <a:rPr lang="en-US" dirty="0"/>
+              <a:t/>
+            </a:r>
+            <a:endParaRPr lang="en-US" dirty="0"/>
+          </a:p>
+        </p:txBody>
+      </p:sp>
+      <p:sp>
+        <p:nvSpPr>
+          <p:cNvPr id="4" name="Slide Number Placeholder 3"/>
+          <p:cNvSpPr>
+            <a:spLocks noGrp="1"/>
+          </p:cNvSpPr>
+          <p:nvPr>
+            <p:ph type="sldNum" sz="quarter" idx="10"/>
+          </p:nvPr>
+        </p:nvSpPr>
+        <p:spPr/>
+        <p:txBody>
+          <a:bodyPr/>
+          <a:lstStyle/>
+          <a:p>
+            <a:fld id="{F7021451-1387-4CA6-816F-3879F97B5CBC}" type="slidenum">
+              <a:rPr lang="en-US"/>
+              <a:t>16</a:t>
+            </a:fld>
+            <a:endParaRPr lang="en-US"/>
+          </a:p>
+        </p:txBody>
+      </p:sp>
+    </p:spTree>
+    <p:extLst>
+      <p:ext uri="{BB962C8B-B14F-4D97-AF65-F5344CB8AC3E}">
+        <p14:creationId xmlns:p14="http://schemas.microsoft.com/office/powerpoint/2010/main" val="1024086991"/>
+      </p:ext>
+    </p:extLst>
+  </p:cSld>
+  <p:clrMapOvr>
+    <a:masterClrMapping/>
+  </p:clrMapOvr>
+</p:notes>
+</file>
+
+<file path=ppt/notesSlides/notesSlide17.xml><?xml version="1.0" encoding="utf-8"?>
+<p:notes xmlns:a="http://schemas.openxmlformats.org/drawingml/2006/main" xmlns:r="http://schemas.openxmlformats.org/officeDocument/2006/relationships" xmlns:p="http://schemas.openxmlformats.org/presentationml/2006/main">
+  <p:cSld>
+    <p:spTree>
+      <p:nvGrpSpPr>
+        <p:cNvPr id="1" name=""/>
+        <p:cNvGrpSpPr/>
+        <p:nvPr/>
+      </p:nvGrpSpPr>
+      <p:grpSpPr>
+        <a:xfrm>
+          <a:off x="0" y="0"/>
+          <a:ext cx="0" cy="0"/>
+          <a:chOff x="0" y="0"/>
+          <a:chExt cx="0" cy="0"/>
+        </a:xfrm>
+      </p:grpSpPr>
+      <p:sp>
+        <p:nvSpPr>
+          <p:cNvPr id="2" name="Slide Image Placeholder 1"/>
+          <p:cNvSpPr>
+            <a:spLocks noGrp="1" noRot="1" noChangeAspect="1"/>
+          </p:cNvSpPr>
+          <p:nvPr>
+            <p:ph type="sldImg"/>
+          </p:nvPr>
+        </p:nvSpPr>
+        <p:spPr/>
+      </p:sp>
+      <p:sp>
+        <p:nvSpPr>
+          <p:cNvPr id="3" name="Notes Placeholder 2"/>
+          <p:cNvSpPr>
+            <a:spLocks noGrp="1"/>
+          </p:cNvSpPr>
+          <p:nvPr>
+            <p:ph type="body" idx="1"/>
+          </p:nvPr>
+        </p:nvSpPr>
+        <p:spPr/>
+        <p:txBody>
+          <a:bodyPr/>
+          <a:lstStyle/>
+          <a:p>
+            <a:r>
+              <a:rPr lang="en-US" dirty="0"/>
+              <a:t/>
+            </a:r>
+            <a:endParaRPr lang="en-US" dirty="0"/>
+          </a:p>
+        </p:txBody>
+      </p:sp>
+      <p:sp>
+        <p:nvSpPr>
+          <p:cNvPr id="4" name="Slide Number Placeholder 3"/>
+          <p:cNvSpPr>
+            <a:spLocks noGrp="1"/>
+          </p:cNvSpPr>
+          <p:nvPr>
+            <p:ph type="sldNum" sz="quarter" idx="10"/>
+          </p:nvPr>
+        </p:nvSpPr>
+        <p:spPr/>
+        <p:txBody>
+          <a:bodyPr/>
+          <a:lstStyle/>
+          <a:p>
+            <a:fld id="{F7021451-1387-4CA6-816F-3879F97B5CBC}" type="slidenum">
+              <a:rPr lang="en-US"/>
+              <a:t>17</a:t>
             </a:fld>
             <a:endParaRPr lang="en-US"/>
           </a:p>
@@ -2235,102 +2591,6 @@
         </p:nvSpPr>
         <p:spPr>
           <a:xfrm>
-            <a:off x="406301" y="1223963"/>
-            <a:ext cx="8498026" cy="274290"/>
-          </a:xfrm>
-          <a:prstGeom prst="rect">
-            <a:avLst/>
-          </a:prstGeom>
-          <a:noFill/>
-          <a:ln/>
-        </p:spPr>
-        <p:txBody>
-          <a:bodyPr wrap="square" lIns="0" tIns="0" rIns="0" bIns="0" rtlCol="0" anchor="t"/>
-          <a:lstStyle/>
-          <a:p>
-            <a:pPr algn="l" indent="0" marL="0">
-              <a:lnSpc>
-                <a:spcPts val="2160"/>
-              </a:lnSpc>
-              <a:spcBef>
-                <a:spcPts val="600"/>
-              </a:spcBef>
-              <a:spcAft>
-                <a:spcPts val="800"/>
-              </a:spcAft>
-              <a:buNone/>
-            </a:pPr>
-            <a:r>
-              <a:rPr lang="en-US" sz="1800" b="1" dirty="0">
-                <a:solidFill>
-                  <a:srgbClr val="FE4447"/>
-                </a:solidFill>
-                <a:latin typeface="Georgia" pitchFamily="34" charset="0"/>
-                <a:ea typeface="Georgia" pitchFamily="34" charset="-122"/>
-                <a:cs typeface="Georgia" pitchFamily="34" charset="-120"/>
-              </a:rPr>
-              <a:t>Learning objective</a:t>
-            </a:r>
-            <a:endParaRPr lang="en-US" sz="1800" dirty="0"/>
-          </a:p>
-        </p:txBody>
-      </p:sp>
-      <p:sp>
-        <p:nvSpPr>
-          <p:cNvPr id="6" name="Text 4"/>
-          <p:cNvSpPr/>
-          <p:nvPr/>
-        </p:nvSpPr>
-        <p:spPr>
-          <a:xfrm>
-            <a:off x="406301" y="1637854"/>
-            <a:ext cx="8498026" cy="426541"/>
-          </a:xfrm>
-          <a:prstGeom prst="rect">
-            <a:avLst/>
-          </a:prstGeom>
-          <a:noFill/>
-          <a:ln/>
-        </p:spPr>
-        <p:txBody>
-          <a:bodyPr wrap="square" lIns="0" tIns="0" rIns="0" bIns="0" rtlCol="0" anchor="t"/>
-          <a:lstStyle/>
-          <a:p>
-            <a:pPr algn="l" indent="0" marL="0">
-              <a:lnSpc>
-                <a:spcPts val="1680"/>
-              </a:lnSpc>
-              <a:spcBef>
-                <a:spcPts val="300"/>
-              </a:spcBef>
-              <a:spcAft>
-                <a:spcPts val="300"/>
-              </a:spcAft>
-              <a:buNone/>
-            </a:pPr>
-            <a:r>
-              <a:rPr lang="en-US" sz="1200" dirty="0">
-                <a:solidFill>
-                  <a:srgbClr val="1C2833"/>
-                </a:solidFill>
-                <a:latin typeface="Arial" pitchFamily="34" charset="0"/>
-                <a:ea typeface="Arial" pitchFamily="34" charset="-122"/>
-                <a:cs typeface="Arial" pitchFamily="34" charset="-120"/>
-              </a:rPr>
-              <a:t>By the end of this lesson, students will (a) state the definition of a magic square, and (b) construct a 3×3 magic square with the numbers 1 to 9 by their own trial.</a:t>
-            </a:r>
-            <a:endParaRPr lang="en-US" sz="1200" dirty="0"/>
-          </a:p>
-        </p:txBody>
-      </p:sp>
-      <p:sp>
-        <p:nvSpPr>
-          <p:cNvPr id="7" name="Text 5"/>
-          <p:cNvSpPr/>
-          <p:nvPr/>
-        </p:nvSpPr>
-        <p:spPr>
-          <a:xfrm>
             <a:off x="406301" y="4434929"/>
             <a:ext cx="8498026" cy="213271"/>
           </a:xfrm>
@@ -2475,7 +2735,7 @@
                 <a:ea typeface="Georgia" pitchFamily="34" charset="-122"/>
                 <a:cs typeface="Georgia" pitchFamily="34" charset="-120"/>
               </a:rPr>
-              <a:t>Homework</a:t>
+              <a:t>Core (20 min) (cont.)</a:t>
             </a:r>
             <a:endParaRPr lang="en-US" sz="1800" dirty="0"/>
           </a:p>
@@ -2489,8 +2749,8 @@
         </p:nvSpPr>
         <p:spPr>
           <a:xfrm>
-            <a:off x="406301" y="870942"/>
-            <a:ext cx="8498026" cy="426541"/>
+            <a:off x="634901" y="883593"/>
+            <a:ext cx="8102798" cy="281880"/>
           </a:xfrm>
           <a:prstGeom prst="rect">
             <a:avLst/>
@@ -2502,20 +2762,18 @@
           <a:bodyPr wrap="square" lIns="0" tIns="0" rIns="0" bIns="0" rtlCol="0" anchor="t"/>
           <a:lstStyle/>
           <a:p>
-            <a:pPr algn="l" indent="0" marL="0">
-              <a:lnSpc>
-                <a:spcPts val="1680"/>
-              </a:lnSpc>
-              <a:spcBef>
-                <a:spcPts val="300"/>
-              </a:spcBef>
-              <a:spcAft>
-                <a:spcPts val="300"/>
-              </a:spcAft>
-              <a:buNone/>
-            </a:pPr>
-            <a:r>
-              <a:rPr lang="en-US" sz="1200" dirty="0">
+            <a:pPr algn="l" marL="342900" indent="-342900">
+              <a:lnSpc>
+                <a:spcPts val="1620"/>
+              </a:lnSpc>
+              <a:spcAft>
+                <a:spcPts val="300"/>
+              </a:spcAft>
+              <a:buSzPct val="100000"/>
+              <a:buChar char="•"/>
+            </a:pPr>
+            <a:r>
+              <a:rPr lang="en-US" sz="1200" b="1" dirty="0">
                 <a:solidFill>
                   <a:srgbClr val="1C2833"/>
                 </a:solidFill>
@@ -2523,7 +2781,27 @@
                 <a:ea typeface="Arial" pitchFamily="34" charset="-122"/>
                 <a:cs typeface="Arial" pitchFamily="34" charset="-120"/>
               </a:rPr>
-              <a:t>– On graph paper, copy the magic square shown in class. Then, beside it, draw three different "rotations" of it (turn the page 90°, 180°, 270°). Are they still magic squares? Verify one row of each.</a:t>
+              <a:t>Definition on the board.</a:t>
+            </a:r>
+            <a:pPr algn="l" indent="0" marL="0">
+              <a:lnSpc>
+                <a:spcPts val="1620"/>
+              </a:lnSpc>
+              <a:spcAft>
+                <a:spcPts val="300"/>
+              </a:spcAft>
+              <a:buNone/>
+            </a:pPr>
+            <a:r>
+              <a:rPr lang="en-US" sz="1200" dirty="0">
+                <a:solidFill>
+                  <a:srgbClr val="1C2833"/>
+                </a:solidFill>
+                <a:latin typeface="Arial" pitchFamily="34" charset="0"/>
+                <a:ea typeface="Arial" pitchFamily="34" charset="-122"/>
+                <a:cs typeface="Arial" pitchFamily="34" charset="-120"/>
+              </a:rPr>
+              <a:t> Students copy this into their notebooks:</a:t>
             </a:r>
             <a:endParaRPr lang="en-US" sz="1200" dirty="0"/>
           </a:p>
@@ -2532,6 +2810,245 @@
       <p:sp>
         <p:nvSpPr>
           <p:cNvPr id="5" name="Text 3"/>
+          <p:cNvSpPr/>
+          <p:nvPr/>
+        </p:nvSpPr>
+        <p:spPr>
+          <a:xfrm>
+            <a:off x="406301" y="1266974"/>
+            <a:ext cx="8331398" cy="842963"/>
+          </a:xfrm>
+          <a:prstGeom prst="rect">
+            <a:avLst/>
+          </a:prstGeom>
+          <a:solidFill>
+            <a:srgbClr val="F4F8F9"/>
+          </a:solidFill>
+          <a:ln/>
+        </p:spPr>
+        <p:txBody>
+          <a:bodyPr wrap="square" rtlCol="0" anchor="ctr"/>
+          <a:lstStyle/>
+          <a:p>
+            <a:pPr indent="0" marL="0">
+              <a:buNone/>
+            </a:pPr>
+            <a:endParaRPr lang="en-US" dirty="0"/>
+          </a:p>
+        </p:txBody>
+      </p:sp>
+      <p:sp>
+        <p:nvSpPr>
+          <p:cNvPr id="6" name="Shape 4"/>
+          <p:cNvSpPr/>
+          <p:nvPr/>
+        </p:nvSpPr>
+        <p:spPr>
+          <a:xfrm>
+            <a:off x="434876" y="1266974"/>
+            <a:ext cx="0" cy="842962"/>
+          </a:xfrm>
+          <a:prstGeom prst="line">
+            <a:avLst/>
+          </a:prstGeom>
+          <a:noFill/>
+          <a:ln w="57150">
+            <a:solidFill>
+              <a:srgbClr val="FE4447"/>
+            </a:solidFill>
+            <a:prstDash val="solid"/>
+          </a:ln>
+        </p:spPr>
+      </p:sp>
+      <p:sp>
+        <p:nvSpPr>
+          <p:cNvPr id="7" name="Text 5"/>
+          <p:cNvSpPr/>
+          <p:nvPr/>
+        </p:nvSpPr>
+        <p:spPr>
+          <a:xfrm>
+            <a:off x="692051" y="1457474"/>
+            <a:ext cx="7973389" cy="461963"/>
+          </a:xfrm>
+          <a:prstGeom prst="rect">
+            <a:avLst/>
+          </a:prstGeom>
+          <a:noFill/>
+          <a:ln/>
+        </p:spPr>
+        <p:txBody>
+          <a:bodyPr wrap="square" lIns="0" tIns="0" rIns="0" bIns="0" rtlCol="0" anchor="t"/>
+          <a:lstStyle/>
+          <a:p>
+            <a:pPr algn="l" indent="0" marL="0">
+              <a:lnSpc>
+                <a:spcPts val="1820"/>
+              </a:lnSpc>
+              <a:spcBef>
+                <a:spcPts val="300"/>
+              </a:spcBef>
+              <a:spcAft>
+                <a:spcPts val="300"/>
+              </a:spcAft>
+              <a:buNone/>
+            </a:pPr>
+            <a:r>
+              <a:rPr lang="en-US" sz="1300" dirty="0">
+                <a:solidFill>
+                  <a:srgbClr val="1C2833"/>
+                </a:solidFill>
+                <a:latin typeface="Georgia" pitchFamily="34" charset="0"/>
+                <a:ea typeface="Georgia" pitchFamily="34" charset="-122"/>
+                <a:cs typeface="Georgia" pitchFamily="34" charset="-120"/>
+              </a:rPr>
+              <a:t>A </a:t>
+            </a:r>
+            <a:pPr algn="l" indent="0" marL="0">
+              <a:lnSpc>
+                <a:spcPts val="1820"/>
+              </a:lnSpc>
+              <a:spcBef>
+                <a:spcPts val="300"/>
+              </a:spcBef>
+              <a:spcAft>
+                <a:spcPts val="300"/>
+              </a:spcAft>
+              <a:buNone/>
+            </a:pPr>
+            <a:r>
+              <a:rPr lang="en-US" sz="1300" b="1" i="1" dirty="0">
+                <a:solidFill>
+                  <a:srgbClr val="1C2833"/>
+                </a:solidFill>
+                <a:latin typeface="Georgia" pitchFamily="34" charset="0"/>
+                <a:ea typeface="Georgia" pitchFamily="34" charset="-122"/>
+                <a:cs typeface="Georgia" pitchFamily="34" charset="-120"/>
+              </a:rPr>
+              <a:t>magic square</a:t>
+            </a:r>
+            <a:pPr algn="l" indent="0" marL="0">
+              <a:lnSpc>
+                <a:spcPts val="1820"/>
+              </a:lnSpc>
+              <a:spcBef>
+                <a:spcPts val="300"/>
+              </a:spcBef>
+              <a:spcAft>
+                <a:spcPts val="300"/>
+              </a:spcAft>
+              <a:buNone/>
+            </a:pPr>
+            <a:r>
+              <a:rPr lang="en-US" sz="1300" dirty="0">
+                <a:solidFill>
+                  <a:srgbClr val="1C2833"/>
+                </a:solidFill>
+                <a:latin typeface="Georgia" pitchFamily="34" charset="0"/>
+                <a:ea typeface="Georgia" pitchFamily="34" charset="-122"/>
+                <a:cs typeface="Georgia" pitchFamily="34" charset="-120"/>
+              </a:rPr>
+              <a:t> is an </a:t>
+            </a:r>
+            <a:pPr algn="l" indent="0" marL="0">
+              <a:lnSpc>
+                <a:spcPts val="1820"/>
+              </a:lnSpc>
+              <a:spcBef>
+                <a:spcPts val="300"/>
+              </a:spcBef>
+              <a:spcAft>
+                <a:spcPts val="300"/>
+              </a:spcAft>
+              <a:buNone/>
+            </a:pPr>
+            <a:r>
+              <a:rPr lang="en-US" sz="1300" i="1" dirty="0">
+                <a:solidFill>
+                  <a:srgbClr val="1C2833"/>
+                </a:solidFill>
+                <a:latin typeface="Georgia" pitchFamily="34" charset="0"/>
+                <a:ea typeface="Georgia" pitchFamily="34" charset="-122"/>
+                <a:cs typeface="Georgia" pitchFamily="34" charset="-120"/>
+              </a:rPr>
+              <a:t>n × n</a:t>
+            </a:r>
+            <a:pPr algn="l" indent="0" marL="0">
+              <a:lnSpc>
+                <a:spcPts val="1820"/>
+              </a:lnSpc>
+              <a:spcBef>
+                <a:spcPts val="300"/>
+              </a:spcBef>
+              <a:spcAft>
+                <a:spcPts val="300"/>
+              </a:spcAft>
+              <a:buNone/>
+            </a:pPr>
+            <a:r>
+              <a:rPr lang="en-US" sz="1300" dirty="0">
+                <a:solidFill>
+                  <a:srgbClr val="1C2833"/>
+                </a:solidFill>
+                <a:latin typeface="Georgia" pitchFamily="34" charset="0"/>
+                <a:ea typeface="Georgia" pitchFamily="34" charset="-122"/>
+                <a:cs typeface="Georgia" pitchFamily="34" charset="-120"/>
+              </a:rPr>
+              <a:t> grid filled with distinct numbers such that every row, every column, and both main diagonals add up to the same total — the </a:t>
+            </a:r>
+            <a:pPr algn="l" indent="0" marL="0">
+              <a:lnSpc>
+                <a:spcPts val="1820"/>
+              </a:lnSpc>
+              <a:spcBef>
+                <a:spcPts val="300"/>
+              </a:spcBef>
+              <a:spcAft>
+                <a:spcPts val="300"/>
+              </a:spcAft>
+              <a:buNone/>
+            </a:pPr>
+            <a:r>
+              <a:rPr lang="en-US" sz="1300" b="1" i="1" dirty="0">
+                <a:solidFill>
+                  <a:srgbClr val="1C2833"/>
+                </a:solidFill>
+                <a:latin typeface="Georgia" pitchFamily="34" charset="0"/>
+                <a:ea typeface="Georgia" pitchFamily="34" charset="-122"/>
+                <a:cs typeface="Georgia" pitchFamily="34" charset="-120"/>
+              </a:rPr>
+              <a:t>magic constant</a:t>
+            </a:r>
+            <a:pPr algn="l" indent="0" marL="0">
+              <a:lnSpc>
+                <a:spcPts val="1820"/>
+              </a:lnSpc>
+              <a:spcBef>
+                <a:spcPts val="300"/>
+              </a:spcBef>
+              <a:spcAft>
+                <a:spcPts val="300"/>
+              </a:spcAft>
+              <a:buNone/>
+            </a:pPr>
+            <a:r>
+              <a:rPr lang="en-US" sz="1300" dirty="0">
+                <a:solidFill>
+                  <a:srgbClr val="1C2833"/>
+                </a:solidFill>
+                <a:latin typeface="Georgia" pitchFamily="34" charset="0"/>
+                <a:ea typeface="Georgia" pitchFamily="34" charset="-122"/>
+                <a:cs typeface="Georgia" pitchFamily="34" charset="-120"/>
+              </a:rPr>
+              <a:t>.</a:t>
+            </a:r>
+            <a:endParaRPr lang="en-US" sz="1300" dirty="0"/>
+          </a:p>
+        </p:txBody>
+      </p:sp>
+      <p:sp>
+        <p:nvSpPr>
+          <p:cNvPr id="8" name="Text 6"/>
           <p:cNvSpPr/>
           <p:nvPr/>
         </p:nvSpPr>
@@ -2681,7 +3198,7 @@
                 <a:ea typeface="Georgia" pitchFamily="34" charset="-122"/>
                 <a:cs typeface="Georgia" pitchFamily="34" charset="-120"/>
               </a:rPr>
-              <a:t>Differentiation</a:t>
+              <a:t>Activity (15 min) — Verify and vary</a:t>
             </a:r>
             <a:endParaRPr lang="en-US" sz="1800" dirty="0"/>
           </a:p>
@@ -2696,7 +3213,7 @@
         <p:spPr>
           <a:xfrm>
             <a:off x="634901" y="883593"/>
-            <a:ext cx="8102798" cy="937022"/>
+            <a:ext cx="8102798" cy="1142702"/>
           </a:xfrm>
           <a:prstGeom prst="rect">
             <a:avLst/>
@@ -2727,7 +3244,7 @@
                 <a:ea typeface="Arial" pitchFamily="34" charset="-122"/>
                 <a:cs typeface="Arial" pitchFamily="34" charset="-120"/>
               </a:rPr>
-              <a:t>One tier up:</a:t>
+              <a:t>Part A (5 min):</a:t>
             </a:r>
             <a:pPr algn="l" indent="0" marL="0">
               <a:lnSpc>
@@ -2747,7 +3264,7 @@
                 <a:ea typeface="Arial" pitchFamily="34" charset="-122"/>
                 <a:cs typeface="Arial" pitchFamily="34" charset="-120"/>
               </a:rPr>
-              <a:t> Try to make a 4×4 magic square using the numbers 1 to 16. (Hard! The magic constant is 34. You will likely fail without a method. That's fine — we'll learn the method later.)</a:t>
+              <a:t> Each student picks any 3 lines (rows, columns, or diagonals) of the revealed square and verifies the sum on their notebook.</a:t>
             </a:r>
             <a:endParaRPr lang="en-US" sz="1200" dirty="0"/>
           </a:p>
@@ -2771,7 +3288,7 @@
                 <a:ea typeface="Arial" pitchFamily="34" charset="-122"/>
                 <a:cs typeface="Arial" pitchFamily="34" charset="-120"/>
               </a:rPr>
-              <a:t>One tier down:</a:t>
+              <a:t>Part B (10 min):</a:t>
             </a:r>
             <a:pPr algn="l" indent="0" marL="0">
               <a:lnSpc>
@@ -2791,7 +3308,47 @@
                 <a:ea typeface="Arial" pitchFamily="34" charset="-122"/>
                 <a:cs typeface="Arial" pitchFamily="34" charset="-120"/>
               </a:rPr>
-              <a:t> Practise just verifying the revealed 3×3 square. Sum every row, column, and diagonal slowly and carefully.</a:t>
+              <a:t> Pairs try to make a </a:t>
+            </a:r>
+            <a:pPr algn="l" indent="0" marL="0">
+              <a:lnSpc>
+                <a:spcPts val="1620"/>
+              </a:lnSpc>
+              <a:spcAft>
+                <a:spcPts val="300"/>
+              </a:spcAft>
+              <a:buNone/>
+            </a:pPr>
+            <a:r>
+              <a:rPr lang="en-US" sz="1200" i="1" dirty="0">
+                <a:solidFill>
+                  <a:srgbClr val="1C2833"/>
+                </a:solidFill>
+                <a:latin typeface="Arial" pitchFamily="34" charset="0"/>
+                <a:ea typeface="Arial" pitchFamily="34" charset="-122"/>
+                <a:cs typeface="Arial" pitchFamily="34" charset="-120"/>
+              </a:rPr>
+              <a:t>different</a:t>
+            </a:r>
+            <a:pPr algn="l" indent="0" marL="0">
+              <a:lnSpc>
+                <a:spcPts val="1620"/>
+              </a:lnSpc>
+              <a:spcAft>
+                <a:spcPts val="300"/>
+              </a:spcAft>
+              <a:buNone/>
+            </a:pPr>
+            <a:r>
+              <a:rPr lang="en-US" sz="1200" dirty="0">
+                <a:solidFill>
+                  <a:srgbClr val="1C2833"/>
+                </a:solidFill>
+                <a:latin typeface="Arial" pitchFamily="34" charset="0"/>
+                <a:ea typeface="Arial" pitchFamily="34" charset="-122"/>
+                <a:cs typeface="Arial" pitchFamily="34" charset="-120"/>
+              </a:rPr>
+              <a:t> 3×3 magic square using 1–9. (Without saying so, you are previewing Day 3 — they will discover symmetries.) Most will produce rotations or reflections of the same square. That is the discovery, not the failure.</a:t>
             </a:r>
             <a:endParaRPr lang="en-US" sz="1200" dirty="0"/>
           </a:p>
@@ -2949,7 +3506,7 @@
                 <a:ea typeface="Georgia" pitchFamily="34" charset="-122"/>
                 <a:cs typeface="Georgia" pitchFamily="34" charset="-120"/>
               </a:rPr>
-              <a:t>Teacher notes</a:t>
+              <a:t>Wrap-up (5 min)</a:t>
             </a:r>
             <a:endParaRPr lang="en-US" sz="1800" dirty="0"/>
           </a:p>
@@ -2963,8 +3520,8 @@
         </p:nvSpPr>
         <p:spPr>
           <a:xfrm>
-            <a:off x="406301" y="870942"/>
-            <a:ext cx="8498026" cy="639812"/>
+            <a:off x="634901" y="883593"/>
+            <a:ext cx="8102798" cy="937022"/>
           </a:xfrm>
           <a:prstGeom prst="rect">
             <a:avLst/>
@@ -2976,17 +3533,15 @@
           <a:bodyPr wrap="square" lIns="0" tIns="0" rIns="0" bIns="0" rtlCol="0" anchor="t"/>
           <a:lstStyle/>
           <a:p>
-            <a:pPr algn="l" indent="0" marL="0">
-              <a:lnSpc>
-                <a:spcPts val="1680"/>
-              </a:lnSpc>
-              <a:spcBef>
-                <a:spcPts val="300"/>
-              </a:spcBef>
-              <a:spcAft>
-                <a:spcPts val="300"/>
-              </a:spcAft>
-              <a:buNone/>
+            <a:pPr algn="l" marL="342900" indent="-342900">
+              <a:lnSpc>
+                <a:spcPts val="1620"/>
+              </a:lnSpc>
+              <a:spcAft>
+                <a:spcPts val="300"/>
+              </a:spcAft>
+              <a:buSzPct val="100000"/>
+              <a:buChar char="•"/>
             </a:pPr>
             <a:r>
               <a:rPr lang="en-US" sz="1200" dirty="0">
@@ -2997,7 +3552,51 @@
                 <a:ea typeface="Arial" pitchFamily="34" charset="-122"/>
                 <a:cs typeface="Arial" pitchFamily="34" charset="-120"/>
               </a:rPr>
-              <a:t>– Resist the urge to give the answer in the first 5 minutes. The discovery is the lesson. – Some students will ask "is it always 15?" Answer: "for THIS square, with THESE numbers (1–9). Tomorrow we'll see why." – A few students will try to use the same number twice. Reinforce that all 9 numbers must be distinct — that's part of the definition.</a:t>
+              <a:t>Quick show of hands: "Did anyone find a square that is genuinely different from the one on the board?" (Most will say yes; some of those "different" squares will be rotations.)</a:t>
+            </a:r>
+            <a:endParaRPr lang="en-US" sz="1200" dirty="0"/>
+          </a:p>
+          <a:p>
+            <a:pPr algn="l" marL="342900" indent="-342900">
+              <a:lnSpc>
+                <a:spcPts val="1620"/>
+              </a:lnSpc>
+              <a:spcAft>
+                <a:spcPts val="300"/>
+              </a:spcAft>
+              <a:buSzPct val="100000"/>
+              <a:buChar char="•"/>
+            </a:pPr>
+            <a:r>
+              <a:rPr lang="en-US" sz="1200" dirty="0">
+                <a:solidFill>
+                  <a:srgbClr val="1C2833"/>
+                </a:solidFill>
+                <a:latin typeface="Arial" pitchFamily="34" charset="0"/>
+                <a:ea typeface="Arial" pitchFamily="34" charset="-122"/>
+                <a:cs typeface="Arial" pitchFamily="34" charset="-120"/>
+              </a:rPr>
+              <a:t>Preview Day 2: </a:t>
+            </a:r>
+            <a:pPr algn="l" indent="0" marL="0">
+              <a:lnSpc>
+                <a:spcPts val="1620"/>
+              </a:lnSpc>
+              <a:spcAft>
+                <a:spcPts val="300"/>
+              </a:spcAft>
+              <a:buNone/>
+            </a:pPr>
+            <a:r>
+              <a:rPr lang="en-US" sz="1200" i="1" dirty="0">
+                <a:solidFill>
+                  <a:srgbClr val="1C2833"/>
+                </a:solidFill>
+                <a:latin typeface="Arial" pitchFamily="34" charset="0"/>
+                <a:ea typeface="Arial" pitchFamily="34" charset="-122"/>
+                <a:cs typeface="Arial" pitchFamily="34" charset="-120"/>
+              </a:rPr>
+              <a:t>"Tomorrow we'll prove why the magic constant is exactly 15 for the 3×3 with 1–9. We won't guess — we'll derive it."</a:t>
             </a:r>
             <a:endParaRPr lang="en-US" sz="1200" dirty="0"/>
           </a:p>
@@ -3155,7 +3754,7 @@
                 <a:ea typeface="Georgia" pitchFamily="34" charset="-122"/>
                 <a:cs typeface="Georgia" pitchFamily="34" charset="-120"/>
               </a:rPr>
-              <a:t>Citation(s) used in this lesson</a:t>
+              <a:t>Student-facing content</a:t>
             </a:r>
             <a:endParaRPr lang="en-US" sz="1800" dirty="0"/>
           </a:p>
@@ -3169,8 +3768,460 @@
         </p:nvSpPr>
         <p:spPr>
           <a:xfrm>
-            <a:off x="406301" y="870942"/>
-            <a:ext cx="8498026" cy="426541"/>
+            <a:off x="406301" y="883593"/>
+            <a:ext cx="8331398" cy="1900238"/>
+          </a:xfrm>
+          <a:prstGeom prst="rect">
+            <a:avLst/>
+          </a:prstGeom>
+          <a:solidFill>
+            <a:srgbClr val="F4F8F9"/>
+          </a:solidFill>
+          <a:ln/>
+        </p:spPr>
+        <p:txBody>
+          <a:bodyPr wrap="square" rtlCol="0" anchor="ctr"/>
+          <a:lstStyle/>
+          <a:p>
+            <a:pPr indent="0" marL="0">
+              <a:buNone/>
+            </a:pPr>
+            <a:endParaRPr lang="en-US" dirty="0"/>
+          </a:p>
+        </p:txBody>
+      </p:sp>
+      <p:sp>
+        <p:nvSpPr>
+          <p:cNvPr id="5" name="Shape 3"/>
+          <p:cNvSpPr/>
+          <p:nvPr/>
+        </p:nvSpPr>
+        <p:spPr>
+          <a:xfrm>
+            <a:off x="434876" y="883593"/>
+            <a:ext cx="0" cy="1900238"/>
+          </a:xfrm>
+          <a:prstGeom prst="line">
+            <a:avLst/>
+          </a:prstGeom>
+          <a:noFill/>
+          <a:ln w="57150">
+            <a:solidFill>
+              <a:srgbClr val="FE4447"/>
+            </a:solidFill>
+            <a:prstDash val="solid"/>
+          </a:ln>
+        </p:spPr>
+      </p:sp>
+      <p:sp>
+        <p:nvSpPr>
+          <p:cNvPr id="6" name="Text 4"/>
+          <p:cNvSpPr/>
+          <p:nvPr/>
+        </p:nvSpPr>
+        <p:spPr>
+          <a:xfrm>
+            <a:off x="692051" y="1074093"/>
+            <a:ext cx="7973389" cy="461963"/>
+          </a:xfrm>
+          <a:prstGeom prst="rect">
+            <a:avLst/>
+          </a:prstGeom>
+          <a:noFill/>
+          <a:ln/>
+        </p:spPr>
+        <p:txBody>
+          <a:bodyPr wrap="square" lIns="0" tIns="0" rIns="0" bIns="0" rtlCol="0" anchor="t"/>
+          <a:lstStyle/>
+          <a:p>
+            <a:pPr algn="l" indent="0" marL="0">
+              <a:lnSpc>
+                <a:spcPts val="1820"/>
+              </a:lnSpc>
+              <a:spcBef>
+                <a:spcPts val="300"/>
+              </a:spcBef>
+              <a:spcAft>
+                <a:spcPts val="300"/>
+              </a:spcAft>
+              <a:buNone/>
+            </a:pPr>
+            <a:r>
+              <a:rPr lang="en-US" sz="1300" b="1" i="1" dirty="0">
+                <a:solidFill>
+                  <a:srgbClr val="1C2833"/>
+                </a:solidFill>
+                <a:latin typeface="Georgia" pitchFamily="34" charset="0"/>
+                <a:ea typeface="Georgia" pitchFamily="34" charset="-122"/>
+                <a:cs typeface="Georgia" pitchFamily="34" charset="-120"/>
+              </a:rPr>
+              <a:t>A magic square</a:t>
+            </a:r>
+            <a:pPr algn="l" indent="0" marL="0">
+              <a:lnSpc>
+                <a:spcPts val="1820"/>
+              </a:lnSpc>
+              <a:spcBef>
+                <a:spcPts val="300"/>
+              </a:spcBef>
+              <a:spcAft>
+                <a:spcPts val="300"/>
+              </a:spcAft>
+              <a:buNone/>
+            </a:pPr>
+            <a:r>
+              <a:rPr lang="en-US" sz="1300" dirty="0">
+                <a:solidFill>
+                  <a:srgbClr val="1C2833"/>
+                </a:solidFill>
+                <a:latin typeface="Georgia" pitchFamily="34" charset="0"/>
+                <a:ea typeface="Georgia" pitchFamily="34" charset="-122"/>
+                <a:cs typeface="Georgia" pitchFamily="34" charset="-120"/>
+              </a:rPr>
+              <a:t> is an </a:t>
+            </a:r>
+            <a:pPr algn="l" indent="0" marL="0">
+              <a:lnSpc>
+                <a:spcPts val="1820"/>
+              </a:lnSpc>
+              <a:spcBef>
+                <a:spcPts val="300"/>
+              </a:spcBef>
+              <a:spcAft>
+                <a:spcPts val="300"/>
+              </a:spcAft>
+              <a:buNone/>
+            </a:pPr>
+            <a:r>
+              <a:rPr lang="en-US" sz="1300" i="1" dirty="0">
+                <a:solidFill>
+                  <a:srgbClr val="1C2833"/>
+                </a:solidFill>
+                <a:latin typeface="Georgia" pitchFamily="34" charset="0"/>
+                <a:ea typeface="Georgia" pitchFamily="34" charset="-122"/>
+                <a:cs typeface="Georgia" pitchFamily="34" charset="-120"/>
+              </a:rPr>
+              <a:t>n × n</a:t>
+            </a:r>
+            <a:pPr algn="l" indent="0" marL="0">
+              <a:lnSpc>
+                <a:spcPts val="1820"/>
+              </a:lnSpc>
+              <a:spcBef>
+                <a:spcPts val="300"/>
+              </a:spcBef>
+              <a:spcAft>
+                <a:spcPts val="300"/>
+              </a:spcAft>
+              <a:buNone/>
+            </a:pPr>
+            <a:r>
+              <a:rPr lang="en-US" sz="1300" dirty="0">
+                <a:solidFill>
+                  <a:srgbClr val="1C2833"/>
+                </a:solidFill>
+                <a:latin typeface="Georgia" pitchFamily="34" charset="0"/>
+                <a:ea typeface="Georgia" pitchFamily="34" charset="-122"/>
+                <a:cs typeface="Georgia" pitchFamily="34" charset="-120"/>
+              </a:rPr>
+              <a:t> grid of distinct numbers where every row, every column, and both main diagonals add up to the same total — the </a:t>
+            </a:r>
+            <a:pPr algn="l" indent="0" marL="0">
+              <a:lnSpc>
+                <a:spcPts val="1820"/>
+              </a:lnSpc>
+              <a:spcBef>
+                <a:spcPts val="300"/>
+              </a:spcBef>
+              <a:spcAft>
+                <a:spcPts val="300"/>
+              </a:spcAft>
+              <a:buNone/>
+            </a:pPr>
+            <a:r>
+              <a:rPr lang="en-US" sz="1300" b="1" i="1" dirty="0">
+                <a:solidFill>
+                  <a:srgbClr val="1C2833"/>
+                </a:solidFill>
+                <a:latin typeface="Georgia" pitchFamily="34" charset="0"/>
+                <a:ea typeface="Georgia" pitchFamily="34" charset="-122"/>
+                <a:cs typeface="Georgia" pitchFamily="34" charset="-120"/>
+              </a:rPr>
+              <a:t>magic constant</a:t>
+            </a:r>
+            <a:pPr algn="l" indent="0" marL="0">
+              <a:lnSpc>
+                <a:spcPts val="1820"/>
+              </a:lnSpc>
+              <a:spcBef>
+                <a:spcPts val="300"/>
+              </a:spcBef>
+              <a:spcAft>
+                <a:spcPts val="300"/>
+              </a:spcAft>
+              <a:buNone/>
+            </a:pPr>
+            <a:r>
+              <a:rPr lang="en-US" sz="1300" dirty="0">
+                <a:solidFill>
+                  <a:srgbClr val="1C2833"/>
+                </a:solidFill>
+                <a:latin typeface="Georgia" pitchFamily="34" charset="0"/>
+                <a:ea typeface="Georgia" pitchFamily="34" charset="-122"/>
+                <a:cs typeface="Georgia" pitchFamily="34" charset="-120"/>
+              </a:rPr>
+              <a:t>.</a:t>
+            </a:r>
+            <a:endParaRPr lang="en-US" sz="1300" dirty="0"/>
+          </a:p>
+        </p:txBody>
+      </p:sp>
+      <p:sp>
+        <p:nvSpPr>
+          <p:cNvPr id="7" name="Text 5"/>
+          <p:cNvSpPr/>
+          <p:nvPr/>
+        </p:nvSpPr>
+        <p:spPr>
+          <a:xfrm>
+            <a:off x="692051" y="1574155"/>
+            <a:ext cx="7973389" cy="230981"/>
+          </a:xfrm>
+          <a:prstGeom prst="rect">
+            <a:avLst/>
+          </a:prstGeom>
+          <a:noFill/>
+          <a:ln/>
+        </p:spPr>
+        <p:txBody>
+          <a:bodyPr wrap="square" lIns="0" tIns="0" rIns="0" bIns="0" rtlCol="0" anchor="t"/>
+          <a:lstStyle/>
+          <a:p>
+            <a:pPr algn="l" indent="0" marL="0">
+              <a:lnSpc>
+                <a:spcPts val="1820"/>
+              </a:lnSpc>
+              <a:spcBef>
+                <a:spcPts val="300"/>
+              </a:spcBef>
+              <a:spcAft>
+                <a:spcPts val="300"/>
+              </a:spcAft>
+              <a:buNone/>
+            </a:pPr>
+            <a:r>
+              <a:rPr lang="en-US" sz="1300" dirty="0">
+                <a:solidFill>
+                  <a:srgbClr val="1C2833"/>
+                </a:solidFill>
+                <a:latin typeface="Georgia" pitchFamily="34" charset="0"/>
+                <a:ea typeface="Georgia" pitchFamily="34" charset="-122"/>
+                <a:cs typeface="Georgia" pitchFamily="34" charset="-120"/>
+              </a:rPr>
+              <a:t>The simplest non-trivial magic square uses the numbers 1 to 9 in a 3×3 grid. Its magic constant is </a:t>
+            </a:r>
+            <a:pPr algn="l" indent="0" marL="0">
+              <a:lnSpc>
+                <a:spcPts val="1820"/>
+              </a:lnSpc>
+              <a:spcBef>
+                <a:spcPts val="300"/>
+              </a:spcBef>
+              <a:spcAft>
+                <a:spcPts val="300"/>
+              </a:spcAft>
+              <a:buNone/>
+            </a:pPr>
+            <a:r>
+              <a:rPr lang="en-US" sz="1300" b="1" i="1" dirty="0">
+                <a:solidFill>
+                  <a:srgbClr val="1C2833"/>
+                </a:solidFill>
+                <a:latin typeface="Georgia" pitchFamily="34" charset="0"/>
+                <a:ea typeface="Georgia" pitchFamily="34" charset="-122"/>
+                <a:cs typeface="Georgia" pitchFamily="34" charset="-120"/>
+              </a:rPr>
+              <a:t>15</a:t>
+            </a:r>
+            <a:pPr algn="l" indent="0" marL="0">
+              <a:lnSpc>
+                <a:spcPts val="1820"/>
+              </a:lnSpc>
+              <a:spcBef>
+                <a:spcPts val="300"/>
+              </a:spcBef>
+              <a:spcAft>
+                <a:spcPts val="300"/>
+              </a:spcAft>
+              <a:buNone/>
+            </a:pPr>
+            <a:r>
+              <a:rPr lang="en-US" sz="1300" dirty="0">
+                <a:solidFill>
+                  <a:srgbClr val="1C2833"/>
+                </a:solidFill>
+                <a:latin typeface="Georgia" pitchFamily="34" charset="0"/>
+                <a:ea typeface="Georgia" pitchFamily="34" charset="-122"/>
+                <a:cs typeface="Georgia" pitchFamily="34" charset="-120"/>
+              </a:rPr>
+              <a:t>.</a:t>
+            </a:r>
+            <a:endParaRPr lang="en-US" sz="1300" dirty="0"/>
+          </a:p>
+        </p:txBody>
+      </p:sp>
+      <p:sp>
+        <p:nvSpPr>
+          <p:cNvPr id="8" name="Text 6"/>
+          <p:cNvSpPr/>
+          <p:nvPr/>
+        </p:nvSpPr>
+        <p:spPr>
+          <a:xfrm>
+            <a:off x="692051" y="1843236"/>
+            <a:ext cx="7973389" cy="250031"/>
+          </a:xfrm>
+          <a:prstGeom prst="rect">
+            <a:avLst/>
+          </a:prstGeom>
+          <a:noFill/>
+          <a:ln/>
+        </p:spPr>
+        <p:txBody>
+          <a:bodyPr wrap="square" lIns="0" tIns="0" rIns="0" bIns="0" rtlCol="0" anchor="t"/>
+          <a:lstStyle/>
+          <a:p>
+            <a:pPr algn="l" indent="0" marL="0">
+              <a:lnSpc>
+                <a:spcPts val="1820"/>
+              </a:lnSpc>
+              <a:spcBef>
+                <a:spcPts val="300"/>
+              </a:spcBef>
+              <a:spcAft>
+                <a:spcPts val="300"/>
+              </a:spcAft>
+              <a:buNone/>
+            </a:pPr>
+            <a:r>
+              <a:rPr lang="en-US" sz="1300" dirty="0">
+                <a:solidFill>
+                  <a:srgbClr val="1C2833"/>
+                </a:solidFill>
+                <a:latin typeface="Georgia" pitchFamily="34" charset="0"/>
+                <a:ea typeface="Georgia" pitchFamily="34" charset="-122"/>
+                <a:cs typeface="Georgia" pitchFamily="34" charset="-120"/>
+              </a:rPr>
+              <a:t>``</a:t>
+            </a:r>
+            <a:pPr algn="l" indent="0" marL="0">
+              <a:lnSpc>
+                <a:spcPts val="1820"/>
+              </a:lnSpc>
+              <a:spcBef>
+                <a:spcPts val="300"/>
+              </a:spcBef>
+              <a:spcAft>
+                <a:spcPts val="300"/>
+              </a:spcAft>
+              <a:buNone/>
+            </a:pPr>
+            <a:r>
+              <a:rPr lang="en-US" sz="1300" i="1" dirty="0">
+                <a:solidFill>
+                  <a:srgbClr val="1C2833"/>
+                </a:solidFill>
+                <a:latin typeface="Georgia" pitchFamily="34" charset="0"/>
+                <a:ea typeface="Georgia" pitchFamily="34" charset="-122"/>
+                <a:cs typeface="Georgia" pitchFamily="34" charset="-120"/>
+              </a:rPr>
+              <a:t> 2 | 7 | 6 --------- 9 | 5 | 1 --------- 4 | 3 | 8</a:t>
+            </a:r>
+            <a:pPr algn="l" indent="0" marL="0">
+              <a:lnSpc>
+                <a:spcPts val="1820"/>
+              </a:lnSpc>
+              <a:spcBef>
+                <a:spcPts val="300"/>
+              </a:spcBef>
+              <a:spcAft>
+                <a:spcPts val="300"/>
+              </a:spcAft>
+              <a:buNone/>
+            </a:pPr>
+            <a:r>
+              <a:rPr lang="en-US" sz="1300" dirty="0">
+                <a:solidFill>
+                  <a:srgbClr val="1C2833"/>
+                </a:solidFill>
+                <a:latin typeface="Georgia" pitchFamily="34" charset="0"/>
+                <a:ea typeface="Georgia" pitchFamily="34" charset="-122"/>
+                <a:cs typeface="Georgia" pitchFamily="34" charset="-120"/>
+              </a:rPr>
+              <a:t>``</a:t>
+            </a:r>
+            <a:endParaRPr lang="en-US" sz="1300" dirty="0"/>
+          </a:p>
+        </p:txBody>
+      </p:sp>
+      <p:sp>
+        <p:nvSpPr>
+          <p:cNvPr id="9" name="Text 7"/>
+          <p:cNvSpPr/>
+          <p:nvPr/>
+        </p:nvSpPr>
+        <p:spPr>
+          <a:xfrm>
+            <a:off x="692051" y="2131368"/>
+            <a:ext cx="7973389" cy="461963"/>
+          </a:xfrm>
+          <a:prstGeom prst="rect">
+            <a:avLst/>
+          </a:prstGeom>
+          <a:noFill/>
+          <a:ln/>
+        </p:spPr>
+        <p:txBody>
+          <a:bodyPr wrap="square" lIns="0" tIns="0" rIns="0" bIns="0" rtlCol="0" anchor="t"/>
+          <a:lstStyle/>
+          <a:p>
+            <a:pPr algn="l" indent="0" marL="0">
+              <a:lnSpc>
+                <a:spcPts val="1820"/>
+              </a:lnSpc>
+              <a:spcBef>
+                <a:spcPts val="300"/>
+              </a:spcBef>
+              <a:spcAft>
+                <a:spcPts val="300"/>
+              </a:spcAft>
+              <a:buNone/>
+            </a:pPr>
+            <a:r>
+              <a:rPr lang="en-US" sz="1300" i="1" dirty="0">
+                <a:solidFill>
+                  <a:srgbClr val="1C2833"/>
+                </a:solidFill>
+                <a:latin typeface="Georgia" pitchFamily="34" charset="0"/>
+                <a:ea typeface="Georgia" pitchFamily="34" charset="-122"/>
+                <a:cs typeface="Georgia" pitchFamily="34" charset="-120"/>
+              </a:rPr>
+              <a:t>Verify: rows → 2+7+6=15, 9+5+1=15, 4+3+8=15. Columns → 2+9+4=15, 7+5+3=15, 6+1+8=15. Diagonals → 2+5+8=15, 6+5+4=15.</a:t>
+            </a:r>
+            <a:endParaRPr lang="en-US" sz="1300" dirty="0"/>
+          </a:p>
+        </p:txBody>
+      </p:sp>
+      <p:sp>
+        <p:nvSpPr>
+          <p:cNvPr id="10" name="Text 8"/>
+          <p:cNvSpPr/>
+          <p:nvPr/>
+        </p:nvSpPr>
+        <p:spPr>
+          <a:xfrm>
+            <a:off x="406301" y="4434929"/>
+            <a:ext cx="8498026" cy="213271"/>
           </a:xfrm>
           <a:prstGeom prst="rect">
             <a:avLst/>
@@ -3203,22 +4254,155 @@
                 <a:ea typeface="Arial" pitchFamily="34" charset="-122"/>
                 <a:cs typeface="Arial" pitchFamily="34" charset="-120"/>
               </a:rPr>
-              <a:t>– Nārāyaṇa Paṇḍita, </a:t>
-            </a:r>
-            <a:pPr algn="l" indent="0" marL="0">
-              <a:lnSpc>
-                <a:spcPts val="1680"/>
+              <a:t>Middle ·  · IKS Curriculum</a:t>
+            </a:r>
+            <a:endParaRPr lang="en-US" sz="1200" dirty="0"/>
+          </a:p>
+        </p:txBody>
+      </p:sp>
+    </p:spTree>
+  </p:cSld>
+  <p:clrMapOvr>
+    <a:masterClrMapping/>
+  </p:clrMapOvr>
+</p:sld>
+</file>
+
+<file path=ppt/slides/slide14.xml><?xml version="1.0" encoding="utf-8"?>
+<p:sld xmlns:a="http://schemas.openxmlformats.org/drawingml/2006/main" xmlns:r="http://schemas.openxmlformats.org/officeDocument/2006/relationships" xmlns:p="http://schemas.openxmlformats.org/presentationml/2006/main">
+  <p:cSld name="Slide 14">
+    <p:bg>
+      <p:bgPr>
+        <a:solidFill>
+          <a:srgbClr val="FFFFFF"/>
+        </a:solidFill>
+      </p:bgPr>
+    </p:bg>
+    <p:spTree>
+      <p:nvGrpSpPr>
+        <p:cNvPr id="1" name=""/>
+        <p:cNvGrpSpPr/>
+        <p:nvPr/>
+      </p:nvGrpSpPr>
+      <p:grpSpPr>
+        <a:xfrm>
+          <a:off x="0" y="0"/>
+          <a:ext cx="0" cy="0"/>
+          <a:chOff x="0" y="0"/>
+          <a:chExt cx="0" cy="0"/>
+        </a:xfrm>
+      </p:grpSpPr>
+      <p:sp>
+        <p:nvSpPr>
+          <p:cNvPr id="2" name="Text 0"/>
+          <p:cNvSpPr/>
+          <p:nvPr/>
+        </p:nvSpPr>
+        <p:spPr>
+          <a:xfrm>
+            <a:off x="0" y="0"/>
+            <a:ext cx="9144000" cy="101501"/>
+          </a:xfrm>
+          <a:prstGeom prst="rect">
+            <a:avLst/>
+          </a:prstGeom>
+          <a:solidFill>
+            <a:srgbClr val="277884"/>
+          </a:solidFill>
+          <a:ln/>
+        </p:spPr>
+        <p:txBody>
+          <a:bodyPr wrap="square" rtlCol="0" anchor="ctr"/>
+          <a:lstStyle/>
+          <a:p>
+            <a:pPr indent="0" marL="0">
+              <a:buNone/>
+            </a:pPr>
+            <a:endParaRPr lang="en-US" dirty="0"/>
+          </a:p>
+        </p:txBody>
+      </p:sp>
+      <p:sp>
+        <p:nvSpPr>
+          <p:cNvPr id="3" name="Text 1"/>
+          <p:cNvSpPr/>
+          <p:nvPr/>
+        </p:nvSpPr>
+        <p:spPr>
+          <a:xfrm>
+            <a:off x="406301" y="457051"/>
+            <a:ext cx="8498026" cy="274290"/>
+          </a:xfrm>
+          <a:prstGeom prst="rect">
+            <a:avLst/>
+          </a:prstGeom>
+          <a:noFill/>
+          <a:ln/>
+        </p:spPr>
+        <p:txBody>
+          <a:bodyPr wrap="square" lIns="0" tIns="0" rIns="0" bIns="0" rtlCol="0" anchor="t"/>
+          <a:lstStyle/>
+          <a:p>
+            <a:pPr algn="l" indent="0" marL="0">
+              <a:lnSpc>
+                <a:spcPts val="2160"/>
               </a:lnSpc>
               <a:spcBef>
-                <a:spcPts val="300"/>
+                <a:spcPts val="600"/>
               </a:spcBef>
               <a:spcAft>
-                <a:spcPts val="300"/>
-              </a:spcAft>
-              <a:buNone/>
-            </a:pPr>
-            <a:r>
-              <a:rPr lang="en-US" sz="1200" i="1" dirty="0">
+                <a:spcPts val="800"/>
+              </a:spcAft>
+              <a:buNone/>
+            </a:pPr>
+            <a:r>
+              <a:rPr lang="en-US" sz="1800" b="1" dirty="0">
+                <a:solidFill>
+                  <a:srgbClr val="FE4447"/>
+                </a:solidFill>
+                <a:latin typeface="Georgia" pitchFamily="34" charset="0"/>
+                <a:ea typeface="Georgia" pitchFamily="34" charset="-122"/>
+                <a:cs typeface="Georgia" pitchFamily="34" charset="-120"/>
+              </a:rPr>
+              <a:t>Homework</a:t>
+            </a:r>
+            <a:endParaRPr lang="en-US" sz="1800" dirty="0"/>
+          </a:p>
+        </p:txBody>
+      </p:sp>
+      <p:sp>
+        <p:nvSpPr>
+          <p:cNvPr id="4" name="Text 2"/>
+          <p:cNvSpPr/>
+          <p:nvPr/>
+        </p:nvSpPr>
+        <p:spPr>
+          <a:xfrm>
+            <a:off x="634901" y="883593"/>
+            <a:ext cx="8102798" cy="487561"/>
+          </a:xfrm>
+          <a:prstGeom prst="rect">
+            <a:avLst/>
+          </a:prstGeom>
+          <a:noFill/>
+          <a:ln/>
+        </p:spPr>
+        <p:txBody>
+          <a:bodyPr wrap="square" lIns="0" tIns="0" rIns="0" bIns="0" rtlCol="0" anchor="t"/>
+          <a:lstStyle/>
+          <a:p>
+            <a:pPr algn="l" marL="342900" indent="-342900">
+              <a:lnSpc>
+                <a:spcPts val="1620"/>
+              </a:lnSpc>
+              <a:spcAft>
+                <a:spcPts val="300"/>
+              </a:spcAft>
+              <a:buSzPct val="100000"/>
+              <a:buChar char="•"/>
+            </a:pPr>
+            <a:r>
+              <a:rPr lang="en-US" sz="1200" dirty="0">
                 <a:solidFill>
                   <a:srgbClr val="1C2833"/>
                 </a:solidFill>
@@ -3226,8 +4410,33 @@
                 <a:ea typeface="Arial" pitchFamily="34" charset="-122"/>
                 <a:cs typeface="Arial" pitchFamily="34" charset="-120"/>
               </a:rPr>
-              <a:t>Gaṇita-kaumudī</a:t>
-            </a:r>
+              <a:t>On graph paper, copy the magic square shown in class. Then, beside it, draw three different "rotations" of it (turn the page 90°, 180°, 270°). Are they still magic squares? Verify one row of each.</a:t>
+            </a:r>
+            <a:endParaRPr lang="en-US" sz="1200" dirty="0"/>
+          </a:p>
+        </p:txBody>
+      </p:sp>
+      <p:sp>
+        <p:nvSpPr>
+          <p:cNvPr id="5" name="Text 3"/>
+          <p:cNvSpPr/>
+          <p:nvPr/>
+        </p:nvSpPr>
+        <p:spPr>
+          <a:xfrm>
+            <a:off x="406301" y="4434929"/>
+            <a:ext cx="8498026" cy="213271"/>
+          </a:xfrm>
+          <a:prstGeom prst="rect">
+            <a:avLst/>
+          </a:prstGeom>
+          <a:noFill/>
+          <a:ln/>
+        </p:spPr>
+        <p:txBody>
+          <a:bodyPr wrap="square" lIns="0" tIns="0" rIns="0" bIns="0" rtlCol="0" anchor="t"/>
+          <a:lstStyle/>
+          <a:p>
             <a:pPr algn="l" indent="0" marL="0">
               <a:lnSpc>
                 <a:spcPts val="1680"/>
@@ -3249,22 +4458,155 @@
                 <a:ea typeface="Arial" pitchFamily="34" charset="-122"/>
                 <a:cs typeface="Arial" pitchFamily="34" charset="-120"/>
               </a:rPr>
-              <a:t>, Book 14 (</a:t>
-            </a:r>
-            <a:pPr algn="l" indent="0" marL="0">
-              <a:lnSpc>
-                <a:spcPts val="1680"/>
+              <a:t>Middle ·  · IKS Curriculum</a:t>
+            </a:r>
+            <a:endParaRPr lang="en-US" sz="1200" dirty="0"/>
+          </a:p>
+        </p:txBody>
+      </p:sp>
+    </p:spTree>
+  </p:cSld>
+  <p:clrMapOvr>
+    <a:masterClrMapping/>
+  </p:clrMapOvr>
+</p:sld>
+</file>
+
+<file path=ppt/slides/slide15.xml><?xml version="1.0" encoding="utf-8"?>
+<p:sld xmlns:a="http://schemas.openxmlformats.org/drawingml/2006/main" xmlns:r="http://schemas.openxmlformats.org/officeDocument/2006/relationships" xmlns:p="http://schemas.openxmlformats.org/presentationml/2006/main">
+  <p:cSld name="Slide 15">
+    <p:bg>
+      <p:bgPr>
+        <a:solidFill>
+          <a:srgbClr val="FFFFFF"/>
+        </a:solidFill>
+      </p:bgPr>
+    </p:bg>
+    <p:spTree>
+      <p:nvGrpSpPr>
+        <p:cNvPr id="1" name=""/>
+        <p:cNvGrpSpPr/>
+        <p:nvPr/>
+      </p:nvGrpSpPr>
+      <p:grpSpPr>
+        <a:xfrm>
+          <a:off x="0" y="0"/>
+          <a:ext cx="0" cy="0"/>
+          <a:chOff x="0" y="0"/>
+          <a:chExt cx="0" cy="0"/>
+        </a:xfrm>
+      </p:grpSpPr>
+      <p:sp>
+        <p:nvSpPr>
+          <p:cNvPr id="2" name="Text 0"/>
+          <p:cNvSpPr/>
+          <p:nvPr/>
+        </p:nvSpPr>
+        <p:spPr>
+          <a:xfrm>
+            <a:off x="0" y="0"/>
+            <a:ext cx="9144000" cy="101501"/>
+          </a:xfrm>
+          <a:prstGeom prst="rect">
+            <a:avLst/>
+          </a:prstGeom>
+          <a:solidFill>
+            <a:srgbClr val="277884"/>
+          </a:solidFill>
+          <a:ln/>
+        </p:spPr>
+        <p:txBody>
+          <a:bodyPr wrap="square" rtlCol="0" anchor="ctr"/>
+          <a:lstStyle/>
+          <a:p>
+            <a:pPr indent="0" marL="0">
+              <a:buNone/>
+            </a:pPr>
+            <a:endParaRPr lang="en-US" dirty="0"/>
+          </a:p>
+        </p:txBody>
+      </p:sp>
+      <p:sp>
+        <p:nvSpPr>
+          <p:cNvPr id="3" name="Text 1"/>
+          <p:cNvSpPr/>
+          <p:nvPr/>
+        </p:nvSpPr>
+        <p:spPr>
+          <a:xfrm>
+            <a:off x="406301" y="457051"/>
+            <a:ext cx="8498026" cy="274290"/>
+          </a:xfrm>
+          <a:prstGeom prst="rect">
+            <a:avLst/>
+          </a:prstGeom>
+          <a:noFill/>
+          <a:ln/>
+        </p:spPr>
+        <p:txBody>
+          <a:bodyPr wrap="square" lIns="0" tIns="0" rIns="0" bIns="0" rtlCol="0" anchor="t"/>
+          <a:lstStyle/>
+          <a:p>
+            <a:pPr algn="l" indent="0" marL="0">
+              <a:lnSpc>
+                <a:spcPts val="2160"/>
               </a:lnSpc>
               <a:spcBef>
-                <a:spcPts val="300"/>
+                <a:spcPts val="600"/>
               </a:spcBef>
               <a:spcAft>
-                <a:spcPts val="300"/>
-              </a:spcAft>
-              <a:buNone/>
-            </a:pPr>
-            <a:r>
-              <a:rPr lang="en-US" sz="1200" i="1" dirty="0">
+                <a:spcPts val="800"/>
+              </a:spcAft>
+              <a:buNone/>
+            </a:pPr>
+            <a:r>
+              <a:rPr lang="en-US" sz="1800" b="1" dirty="0">
+                <a:solidFill>
+                  <a:srgbClr val="FE4447"/>
+                </a:solidFill>
+                <a:latin typeface="Georgia" pitchFamily="34" charset="0"/>
+                <a:ea typeface="Georgia" pitchFamily="34" charset="-122"/>
+                <a:cs typeface="Georgia" pitchFamily="34" charset="-120"/>
+              </a:rPr>
+              <a:t>Differentiation</a:t>
+            </a:r>
+            <a:endParaRPr lang="en-US" sz="1800" dirty="0"/>
+          </a:p>
+        </p:txBody>
+      </p:sp>
+      <p:sp>
+        <p:nvSpPr>
+          <p:cNvPr id="4" name="Text 2"/>
+          <p:cNvSpPr/>
+          <p:nvPr/>
+        </p:nvSpPr>
+        <p:spPr>
+          <a:xfrm>
+            <a:off x="634901" y="883593"/>
+            <a:ext cx="8102798" cy="937022"/>
+          </a:xfrm>
+          <a:prstGeom prst="rect">
+            <a:avLst/>
+          </a:prstGeom>
+          <a:noFill/>
+          <a:ln/>
+        </p:spPr>
+        <p:txBody>
+          <a:bodyPr wrap="square" lIns="0" tIns="0" rIns="0" bIns="0" rtlCol="0" anchor="t"/>
+          <a:lstStyle/>
+          <a:p>
+            <a:pPr algn="l" marL="342900" indent="-342900">
+              <a:lnSpc>
+                <a:spcPts val="1620"/>
+              </a:lnSpc>
+              <a:spcAft>
+                <a:spcPts val="300"/>
+              </a:spcAft>
+              <a:buSzPct val="100000"/>
+              <a:buChar char="•"/>
+            </a:pPr>
+            <a:r>
+              <a:rPr lang="en-US" sz="1200" b="1" dirty="0">
                 <a:solidFill>
                   <a:srgbClr val="1C2833"/>
                 </a:solidFill>
@@ -3272,15 +4614,592 @@
                 <a:ea typeface="Arial" pitchFamily="34" charset="-122"/>
                 <a:cs typeface="Arial" pitchFamily="34" charset="-120"/>
               </a:rPr>
+              <a:t>One tier up:</a:t>
+            </a:r>
+            <a:pPr algn="l" indent="0" marL="0">
+              <a:lnSpc>
+                <a:spcPts val="1620"/>
+              </a:lnSpc>
+              <a:spcAft>
+                <a:spcPts val="300"/>
+              </a:spcAft>
+              <a:buNone/>
+            </a:pPr>
+            <a:r>
+              <a:rPr lang="en-US" sz="1200" dirty="0">
+                <a:solidFill>
+                  <a:srgbClr val="1C2833"/>
+                </a:solidFill>
+                <a:latin typeface="Arial" pitchFamily="34" charset="0"/>
+                <a:ea typeface="Arial" pitchFamily="34" charset="-122"/>
+                <a:cs typeface="Arial" pitchFamily="34" charset="-120"/>
+              </a:rPr>
+              <a:t> Try to make a 4×4 magic square using the numbers 1 to 16. (Hard! The magic constant is 34. You will likely fail without a method. That's fine — we'll learn the method later.)</a:t>
+            </a:r>
+            <a:endParaRPr lang="en-US" sz="1200" dirty="0"/>
+          </a:p>
+          <a:p>
+            <a:pPr algn="l" marL="342900" indent="-342900">
+              <a:lnSpc>
+                <a:spcPts val="1620"/>
+              </a:lnSpc>
+              <a:spcAft>
+                <a:spcPts val="300"/>
+              </a:spcAft>
+              <a:buSzPct val="100000"/>
+              <a:buChar char="•"/>
+            </a:pPr>
+            <a:r>
+              <a:rPr lang="en-US" sz="1200" b="1" dirty="0">
+                <a:solidFill>
+                  <a:srgbClr val="1C2833"/>
+                </a:solidFill>
+                <a:latin typeface="Arial" pitchFamily="34" charset="0"/>
+                <a:ea typeface="Arial" pitchFamily="34" charset="-122"/>
+                <a:cs typeface="Arial" pitchFamily="34" charset="-120"/>
+              </a:rPr>
+              <a:t>One tier down:</a:t>
+            </a:r>
+            <a:pPr algn="l" indent="0" marL="0">
+              <a:lnSpc>
+                <a:spcPts val="1620"/>
+              </a:lnSpc>
+              <a:spcAft>
+                <a:spcPts val="300"/>
+              </a:spcAft>
+              <a:buNone/>
+            </a:pPr>
+            <a:r>
+              <a:rPr lang="en-US" sz="1200" dirty="0">
+                <a:solidFill>
+                  <a:srgbClr val="1C2833"/>
+                </a:solidFill>
+                <a:latin typeface="Arial" pitchFamily="34" charset="0"/>
+                <a:ea typeface="Arial" pitchFamily="34" charset="-122"/>
+                <a:cs typeface="Arial" pitchFamily="34" charset="-120"/>
+              </a:rPr>
+              <a:t> Practise just verifying the revealed 3×3 square. Sum every row, column, and diagonal slowly and carefully.</a:t>
+            </a:r>
+            <a:endParaRPr lang="en-US" sz="1200" dirty="0"/>
+          </a:p>
+        </p:txBody>
+      </p:sp>
+      <p:sp>
+        <p:nvSpPr>
+          <p:cNvPr id="5" name="Text 3"/>
+          <p:cNvSpPr/>
+          <p:nvPr/>
+        </p:nvSpPr>
+        <p:spPr>
+          <a:xfrm>
+            <a:off x="406301" y="4434929"/>
+            <a:ext cx="8498026" cy="213271"/>
+          </a:xfrm>
+          <a:prstGeom prst="rect">
+            <a:avLst/>
+          </a:prstGeom>
+          <a:noFill/>
+          <a:ln/>
+        </p:spPr>
+        <p:txBody>
+          <a:bodyPr wrap="square" lIns="0" tIns="0" rIns="0" bIns="0" rtlCol="0" anchor="t"/>
+          <a:lstStyle/>
+          <a:p>
+            <a:pPr algn="l" indent="0" marL="0">
+              <a:lnSpc>
+                <a:spcPts val="1680"/>
+              </a:lnSpc>
+              <a:spcBef>
+                <a:spcPts val="300"/>
+              </a:spcBef>
+              <a:spcAft>
+                <a:spcPts val="300"/>
+              </a:spcAft>
+              <a:buNone/>
+            </a:pPr>
+            <a:r>
+              <a:rPr lang="en-US" sz="1200" dirty="0">
+                <a:solidFill>
+                  <a:srgbClr val="1C2833"/>
+                </a:solidFill>
+                <a:latin typeface="Arial" pitchFamily="34" charset="0"/>
+                <a:ea typeface="Arial" pitchFamily="34" charset="-122"/>
+                <a:cs typeface="Arial" pitchFamily="34" charset="-120"/>
+              </a:rPr>
+              <a:t>Middle ·  · IKS Curriculum</a:t>
+            </a:r>
+            <a:endParaRPr lang="en-US" sz="1200" dirty="0"/>
+          </a:p>
+        </p:txBody>
+      </p:sp>
+    </p:spTree>
+  </p:cSld>
+  <p:clrMapOvr>
+    <a:masterClrMapping/>
+  </p:clrMapOvr>
+</p:sld>
+</file>
+
+<file path=ppt/slides/slide16.xml><?xml version="1.0" encoding="utf-8"?>
+<p:sld xmlns:a="http://schemas.openxmlformats.org/drawingml/2006/main" xmlns:r="http://schemas.openxmlformats.org/officeDocument/2006/relationships" xmlns:p="http://schemas.openxmlformats.org/presentationml/2006/main">
+  <p:cSld name="Slide 16">
+    <p:bg>
+      <p:bgPr>
+        <a:solidFill>
+          <a:srgbClr val="FFFFFF"/>
+        </a:solidFill>
+      </p:bgPr>
+    </p:bg>
+    <p:spTree>
+      <p:nvGrpSpPr>
+        <p:cNvPr id="1" name=""/>
+        <p:cNvGrpSpPr/>
+        <p:nvPr/>
+      </p:nvGrpSpPr>
+      <p:grpSpPr>
+        <a:xfrm>
+          <a:off x="0" y="0"/>
+          <a:ext cx="0" cy="0"/>
+          <a:chOff x="0" y="0"/>
+          <a:chExt cx="0" cy="0"/>
+        </a:xfrm>
+      </p:grpSpPr>
+      <p:sp>
+        <p:nvSpPr>
+          <p:cNvPr id="2" name="Text 0"/>
+          <p:cNvSpPr/>
+          <p:nvPr/>
+        </p:nvSpPr>
+        <p:spPr>
+          <a:xfrm>
+            <a:off x="0" y="0"/>
+            <a:ext cx="9144000" cy="101501"/>
+          </a:xfrm>
+          <a:prstGeom prst="rect">
+            <a:avLst/>
+          </a:prstGeom>
+          <a:solidFill>
+            <a:srgbClr val="277884"/>
+          </a:solidFill>
+          <a:ln/>
+        </p:spPr>
+        <p:txBody>
+          <a:bodyPr wrap="square" rtlCol="0" anchor="ctr"/>
+          <a:lstStyle/>
+          <a:p>
+            <a:pPr indent="0" marL="0">
+              <a:buNone/>
+            </a:pPr>
+            <a:endParaRPr lang="en-US" dirty="0"/>
+          </a:p>
+        </p:txBody>
+      </p:sp>
+      <p:sp>
+        <p:nvSpPr>
+          <p:cNvPr id="3" name="Text 1"/>
+          <p:cNvSpPr/>
+          <p:nvPr/>
+        </p:nvSpPr>
+        <p:spPr>
+          <a:xfrm>
+            <a:off x="406301" y="457051"/>
+            <a:ext cx="8498026" cy="274290"/>
+          </a:xfrm>
+          <a:prstGeom prst="rect">
+            <a:avLst/>
+          </a:prstGeom>
+          <a:noFill/>
+          <a:ln/>
+        </p:spPr>
+        <p:txBody>
+          <a:bodyPr wrap="square" lIns="0" tIns="0" rIns="0" bIns="0" rtlCol="0" anchor="t"/>
+          <a:lstStyle/>
+          <a:p>
+            <a:pPr algn="l" indent="0" marL="0">
+              <a:lnSpc>
+                <a:spcPts val="2160"/>
+              </a:lnSpc>
+              <a:spcBef>
+                <a:spcPts val="600"/>
+              </a:spcBef>
+              <a:spcAft>
+                <a:spcPts val="800"/>
+              </a:spcAft>
+              <a:buNone/>
+            </a:pPr>
+            <a:r>
+              <a:rPr lang="en-US" sz="1800" b="1" dirty="0">
+                <a:solidFill>
+                  <a:srgbClr val="FE4447"/>
+                </a:solidFill>
+                <a:latin typeface="Georgia" pitchFamily="34" charset="0"/>
+                <a:ea typeface="Georgia" pitchFamily="34" charset="-122"/>
+                <a:cs typeface="Georgia" pitchFamily="34" charset="-120"/>
+              </a:rPr>
+              <a:t>Teacher notes</a:t>
+            </a:r>
+            <a:endParaRPr lang="en-US" sz="1800" dirty="0"/>
+          </a:p>
+        </p:txBody>
+      </p:sp>
+      <p:sp>
+        <p:nvSpPr>
+          <p:cNvPr id="4" name="Text 2"/>
+          <p:cNvSpPr/>
+          <p:nvPr/>
+        </p:nvSpPr>
+        <p:spPr>
+          <a:xfrm>
+            <a:off x="634901" y="883593"/>
+            <a:ext cx="8102798" cy="1180802"/>
+          </a:xfrm>
+          <a:prstGeom prst="rect">
+            <a:avLst/>
+          </a:prstGeom>
+          <a:noFill/>
+          <a:ln/>
+        </p:spPr>
+        <p:txBody>
+          <a:bodyPr wrap="square" lIns="0" tIns="0" rIns="0" bIns="0" rtlCol="0" anchor="t"/>
+          <a:lstStyle/>
+          <a:p>
+            <a:pPr algn="l" marL="342900" indent="-342900">
+              <a:lnSpc>
+                <a:spcPts val="1620"/>
+              </a:lnSpc>
+              <a:spcAft>
+                <a:spcPts val="300"/>
+              </a:spcAft>
+              <a:buSzPct val="100000"/>
+              <a:buChar char="•"/>
+            </a:pPr>
+            <a:r>
+              <a:rPr lang="en-US" sz="1200" dirty="0">
+                <a:solidFill>
+                  <a:srgbClr val="1C2833"/>
+                </a:solidFill>
+                <a:latin typeface="Arial" pitchFamily="34" charset="0"/>
+                <a:ea typeface="Arial" pitchFamily="34" charset="-122"/>
+                <a:cs typeface="Arial" pitchFamily="34" charset="-120"/>
+              </a:rPr>
+              <a:t>Resist the urge to give the answer in the first 5 minutes. The discovery is the lesson.</a:t>
+            </a:r>
+            <a:endParaRPr lang="en-US" sz="1200" dirty="0"/>
+          </a:p>
+          <a:p>
+            <a:pPr algn="l" marL="342900" indent="-342900">
+              <a:lnSpc>
+                <a:spcPts val="1620"/>
+              </a:lnSpc>
+              <a:spcAft>
+                <a:spcPts val="300"/>
+              </a:spcAft>
+              <a:buSzPct val="100000"/>
+              <a:buChar char="•"/>
+            </a:pPr>
+            <a:r>
+              <a:rPr lang="en-US" sz="1200" dirty="0">
+                <a:solidFill>
+                  <a:srgbClr val="1C2833"/>
+                </a:solidFill>
+                <a:latin typeface="Arial" pitchFamily="34" charset="0"/>
+                <a:ea typeface="Arial" pitchFamily="34" charset="-122"/>
+                <a:cs typeface="Arial" pitchFamily="34" charset="-120"/>
+              </a:rPr>
+              <a:t>Some students will ask "is it always 15?" Answer: "for THIS square, with THESE numbers (1–9). Tomorrow we'll see why."</a:t>
+            </a:r>
+            <a:endParaRPr lang="en-US" sz="1200" dirty="0"/>
+          </a:p>
+          <a:p>
+            <a:pPr algn="l" marL="342900" indent="-342900">
+              <a:lnSpc>
+                <a:spcPts val="1620"/>
+              </a:lnSpc>
+              <a:spcAft>
+                <a:spcPts val="300"/>
+              </a:spcAft>
+              <a:buSzPct val="100000"/>
+              <a:buChar char="•"/>
+            </a:pPr>
+            <a:r>
+              <a:rPr lang="en-US" sz="1200" dirty="0">
+                <a:solidFill>
+                  <a:srgbClr val="1C2833"/>
+                </a:solidFill>
+                <a:latin typeface="Arial" pitchFamily="34" charset="0"/>
+                <a:ea typeface="Arial" pitchFamily="34" charset="-122"/>
+                <a:cs typeface="Arial" pitchFamily="34" charset="-120"/>
+              </a:rPr>
+              <a:t>A few students will try to use the same number twice. Reinforce that all 9 numbers must be distinct — that's part of the definition.</a:t>
+            </a:r>
+            <a:endParaRPr lang="en-US" sz="1200" dirty="0"/>
+          </a:p>
+        </p:txBody>
+      </p:sp>
+      <p:sp>
+        <p:nvSpPr>
+          <p:cNvPr id="5" name="Text 3"/>
+          <p:cNvSpPr/>
+          <p:nvPr/>
+        </p:nvSpPr>
+        <p:spPr>
+          <a:xfrm>
+            <a:off x="406301" y="4434929"/>
+            <a:ext cx="8498026" cy="213271"/>
+          </a:xfrm>
+          <a:prstGeom prst="rect">
+            <a:avLst/>
+          </a:prstGeom>
+          <a:noFill/>
+          <a:ln/>
+        </p:spPr>
+        <p:txBody>
+          <a:bodyPr wrap="square" lIns="0" tIns="0" rIns="0" bIns="0" rtlCol="0" anchor="t"/>
+          <a:lstStyle/>
+          <a:p>
+            <a:pPr algn="l" indent="0" marL="0">
+              <a:lnSpc>
+                <a:spcPts val="1680"/>
+              </a:lnSpc>
+              <a:spcBef>
+                <a:spcPts val="300"/>
+              </a:spcBef>
+              <a:spcAft>
+                <a:spcPts val="300"/>
+              </a:spcAft>
+              <a:buNone/>
+            </a:pPr>
+            <a:r>
+              <a:rPr lang="en-US" sz="1200" dirty="0">
+                <a:solidFill>
+                  <a:srgbClr val="1C2833"/>
+                </a:solidFill>
+                <a:latin typeface="Arial" pitchFamily="34" charset="0"/>
+                <a:ea typeface="Arial" pitchFamily="34" charset="-122"/>
+                <a:cs typeface="Arial" pitchFamily="34" charset="-120"/>
+              </a:rPr>
+              <a:t>Middle ·  · IKS Curriculum</a:t>
+            </a:r>
+            <a:endParaRPr lang="en-US" sz="1200" dirty="0"/>
+          </a:p>
+        </p:txBody>
+      </p:sp>
+    </p:spTree>
+  </p:cSld>
+  <p:clrMapOvr>
+    <a:masterClrMapping/>
+  </p:clrMapOvr>
+</p:sld>
+</file>
+
+<file path=ppt/slides/slide17.xml><?xml version="1.0" encoding="utf-8"?>
+<p:sld xmlns:a="http://schemas.openxmlformats.org/drawingml/2006/main" xmlns:r="http://schemas.openxmlformats.org/officeDocument/2006/relationships" xmlns:p="http://schemas.openxmlformats.org/presentationml/2006/main">
+  <p:cSld name="Slide 17">
+    <p:bg>
+      <p:bgPr>
+        <a:solidFill>
+          <a:srgbClr val="FFFFFF"/>
+        </a:solidFill>
+      </p:bgPr>
+    </p:bg>
+    <p:spTree>
+      <p:nvGrpSpPr>
+        <p:cNvPr id="1" name=""/>
+        <p:cNvGrpSpPr/>
+        <p:nvPr/>
+      </p:nvGrpSpPr>
+      <p:grpSpPr>
+        <a:xfrm>
+          <a:off x="0" y="0"/>
+          <a:ext cx="0" cy="0"/>
+          <a:chOff x="0" y="0"/>
+          <a:chExt cx="0" cy="0"/>
+        </a:xfrm>
+      </p:grpSpPr>
+      <p:sp>
+        <p:nvSpPr>
+          <p:cNvPr id="2" name="Text 0"/>
+          <p:cNvSpPr/>
+          <p:nvPr/>
+        </p:nvSpPr>
+        <p:spPr>
+          <a:xfrm>
+            <a:off x="0" y="0"/>
+            <a:ext cx="9144000" cy="101501"/>
+          </a:xfrm>
+          <a:prstGeom prst="rect">
+            <a:avLst/>
+          </a:prstGeom>
+          <a:solidFill>
+            <a:srgbClr val="277884"/>
+          </a:solidFill>
+          <a:ln/>
+        </p:spPr>
+        <p:txBody>
+          <a:bodyPr wrap="square" rtlCol="0" anchor="ctr"/>
+          <a:lstStyle/>
+          <a:p>
+            <a:pPr indent="0" marL="0">
+              <a:buNone/>
+            </a:pPr>
+            <a:endParaRPr lang="en-US" dirty="0"/>
+          </a:p>
+        </p:txBody>
+      </p:sp>
+      <p:sp>
+        <p:nvSpPr>
+          <p:cNvPr id="3" name="Text 1"/>
+          <p:cNvSpPr/>
+          <p:nvPr/>
+        </p:nvSpPr>
+        <p:spPr>
+          <a:xfrm>
+            <a:off x="406301" y="457051"/>
+            <a:ext cx="8498026" cy="274290"/>
+          </a:xfrm>
+          <a:prstGeom prst="rect">
+            <a:avLst/>
+          </a:prstGeom>
+          <a:noFill/>
+          <a:ln/>
+        </p:spPr>
+        <p:txBody>
+          <a:bodyPr wrap="square" lIns="0" tIns="0" rIns="0" bIns="0" rtlCol="0" anchor="t"/>
+          <a:lstStyle/>
+          <a:p>
+            <a:pPr algn="l" indent="0" marL="0">
+              <a:lnSpc>
+                <a:spcPts val="2160"/>
+              </a:lnSpc>
+              <a:spcBef>
+                <a:spcPts val="600"/>
+              </a:spcBef>
+              <a:spcAft>
+                <a:spcPts val="800"/>
+              </a:spcAft>
+              <a:buNone/>
+            </a:pPr>
+            <a:r>
+              <a:rPr lang="en-US" sz="1800" b="1" dirty="0">
+                <a:solidFill>
+                  <a:srgbClr val="FE4447"/>
+                </a:solidFill>
+                <a:latin typeface="Georgia" pitchFamily="34" charset="0"/>
+                <a:ea typeface="Georgia" pitchFamily="34" charset="-122"/>
+                <a:cs typeface="Georgia" pitchFamily="34" charset="-120"/>
+              </a:rPr>
+              <a:t>Citation(s) used in this lesson</a:t>
+            </a:r>
+            <a:endParaRPr lang="en-US" sz="1800" dirty="0"/>
+          </a:p>
+        </p:txBody>
+      </p:sp>
+      <p:sp>
+        <p:nvSpPr>
+          <p:cNvPr id="4" name="Text 2"/>
+          <p:cNvSpPr/>
+          <p:nvPr/>
+        </p:nvSpPr>
+        <p:spPr>
+          <a:xfrm>
+            <a:off x="634901" y="883593"/>
+            <a:ext cx="8102798" cy="487561"/>
+          </a:xfrm>
+          <a:prstGeom prst="rect">
+            <a:avLst/>
+          </a:prstGeom>
+          <a:noFill/>
+          <a:ln/>
+        </p:spPr>
+        <p:txBody>
+          <a:bodyPr wrap="square" lIns="0" tIns="0" rIns="0" bIns="0" rtlCol="0" anchor="t"/>
+          <a:lstStyle/>
+          <a:p>
+            <a:pPr algn="l" marL="342900" indent="-342900">
+              <a:lnSpc>
+                <a:spcPts val="1620"/>
+              </a:lnSpc>
+              <a:spcAft>
+                <a:spcPts val="300"/>
+              </a:spcAft>
+              <a:buSzPct val="100000"/>
+              <a:buChar char="•"/>
+            </a:pPr>
+            <a:r>
+              <a:rPr lang="en-US" sz="1200" dirty="0">
+                <a:solidFill>
+                  <a:srgbClr val="1C2833"/>
+                </a:solidFill>
+                <a:latin typeface="Arial" pitchFamily="34" charset="0"/>
+                <a:ea typeface="Arial" pitchFamily="34" charset="-122"/>
+                <a:cs typeface="Arial" pitchFamily="34" charset="-120"/>
+              </a:rPr>
+              <a:t>Nārāyaṇa Paṇḍita, </a:t>
+            </a:r>
+            <a:pPr algn="l" indent="0" marL="0">
+              <a:lnSpc>
+                <a:spcPts val="1620"/>
+              </a:lnSpc>
+              <a:spcAft>
+                <a:spcPts val="300"/>
+              </a:spcAft>
+              <a:buNone/>
+            </a:pPr>
+            <a:r>
+              <a:rPr lang="en-US" sz="1200" i="1" dirty="0">
+                <a:solidFill>
+                  <a:srgbClr val="1C2833"/>
+                </a:solidFill>
+                <a:latin typeface="Arial" pitchFamily="34" charset="0"/>
+                <a:ea typeface="Arial" pitchFamily="34" charset="-122"/>
+                <a:cs typeface="Arial" pitchFamily="34" charset="-120"/>
+              </a:rPr>
+              <a:t>Gaṇita-kaumudī</a:t>
+            </a:r>
+            <a:pPr algn="l" indent="0" marL="0">
+              <a:lnSpc>
+                <a:spcPts val="1620"/>
+              </a:lnSpc>
+              <a:spcAft>
+                <a:spcPts val="300"/>
+              </a:spcAft>
+              <a:buNone/>
+            </a:pPr>
+            <a:r>
+              <a:rPr lang="en-US" sz="1200" dirty="0">
+                <a:solidFill>
+                  <a:srgbClr val="1C2833"/>
+                </a:solidFill>
+                <a:latin typeface="Arial" pitchFamily="34" charset="0"/>
+                <a:ea typeface="Arial" pitchFamily="34" charset="-122"/>
+                <a:cs typeface="Arial" pitchFamily="34" charset="-120"/>
+              </a:rPr>
+              <a:t>, Book 14 (</a:t>
+            </a:r>
+            <a:pPr algn="l" indent="0" marL="0">
+              <a:lnSpc>
+                <a:spcPts val="1620"/>
+              </a:lnSpc>
+              <a:spcAft>
+                <a:spcPts val="300"/>
+              </a:spcAft>
+              <a:buNone/>
+            </a:pPr>
+            <a:r>
+              <a:rPr lang="en-US" sz="1200" i="1" dirty="0">
+                <a:solidFill>
+                  <a:srgbClr val="1C2833"/>
+                </a:solidFill>
+                <a:latin typeface="Arial" pitchFamily="34" charset="0"/>
+                <a:ea typeface="Arial" pitchFamily="34" charset="-122"/>
+                <a:cs typeface="Arial" pitchFamily="34" charset="-120"/>
+              </a:rPr>
               <a:t>Bhadragaṇita</a:t>
             </a:r>
             <a:pPr algn="l" indent="0" marL="0">
               <a:lnSpc>
-                <a:spcPts val="1680"/>
-              </a:lnSpc>
-              <a:spcBef>
-                <a:spcPts val="300"/>
-              </a:spcBef>
+                <a:spcPts val="1620"/>
+              </a:lnSpc>
               <a:spcAft>
                 <a:spcPts val="300"/>
               </a:spcAft>
@@ -3453,7 +5372,7 @@
                 <a:ea typeface="Georgia" pitchFamily="34" charset="-122"/>
                 <a:cs typeface="Georgia" pitchFamily="34" charset="-120"/>
               </a:rPr>
-              <a:t>Materials</a:t>
+              <a:t>Learning objective</a:t>
             </a:r>
             <a:endParaRPr lang="en-US" sz="1800" dirty="0"/>
           </a:p>
@@ -3501,7 +5420,7 @@
                 <a:ea typeface="Arial" pitchFamily="34" charset="-122"/>
                 <a:cs typeface="Arial" pitchFamily="34" charset="-120"/>
               </a:rPr>
-              <a:t>– Printed blank 3×3 grid (3 per student, with the digits 1–9 listed beside the first grid) – A loose set of paper tiles or small cards numbered 1–9 (one set per pair) – Whiteboard</a:t>
+              <a:t>By the end of this lesson, students will (a) state the definition of a magic square, and (b) construct a 3×3 magic square with the numbers 1 to 9 by their own trial.</a:t>
             </a:r>
             <a:endParaRPr lang="en-US" sz="1200" dirty="0"/>
           </a:p>
@@ -3659,7 +5578,7 @@
                 <a:ea typeface="Georgia" pitchFamily="34" charset="-122"/>
                 <a:cs typeface="Georgia" pitchFamily="34" charset="-120"/>
               </a:rPr>
-              <a:t>Vocabulary introduced today</a:t>
+              <a:t>Materials</a:t>
             </a:r>
             <a:endParaRPr lang="en-US" sz="1800" dirty="0"/>
           </a:p>
@@ -3674,7 +5593,7 @@
         <p:spPr>
           <a:xfrm>
             <a:off x="634901" y="883593"/>
-            <a:ext cx="8102798" cy="525661"/>
+            <a:ext cx="8102798" cy="769441"/>
           </a:xfrm>
           <a:prstGeom prst="rect">
             <a:avLst/>
@@ -3697,7 +5616,7 @@
               <a:buChar char="•"/>
             </a:pPr>
             <a:r>
-              <a:rPr lang="en-US" sz="1200" i="1" dirty="0">
+              <a:rPr lang="en-US" sz="1200" dirty="0">
                 <a:solidFill>
                   <a:srgbClr val="1C2833"/>
                 </a:solidFill>
@@ -3705,16 +5624,20 @@
                 <a:ea typeface="Arial" pitchFamily="34" charset="-122"/>
                 <a:cs typeface="Arial" pitchFamily="34" charset="-120"/>
               </a:rPr>
-              <a:t>magic square</a:t>
-            </a:r>
-            <a:pPr algn="l" indent="0" marL="0">
+              <a:t>Printed blank 3×3 grid (3 per student, with the digits 1–9 listed beside the first grid)</a:t>
+            </a:r>
+            <a:endParaRPr lang="en-US" sz="1200" dirty="0"/>
+          </a:p>
+          <a:p>
+            <a:pPr algn="l" marL="342900" indent="-342900">
               <a:lnSpc>
                 <a:spcPts val="1620"/>
               </a:lnSpc>
               <a:spcAft>
                 <a:spcPts val="300"/>
               </a:spcAft>
-              <a:buNone/>
+              <a:buSzPct val="100000"/>
+              <a:buChar char="•"/>
             </a:pPr>
             <a:r>
               <a:rPr lang="en-US" sz="1200" dirty="0">
@@ -3725,7 +5648,7 @@
                 <a:ea typeface="Arial" pitchFamily="34" charset="-122"/>
                 <a:cs typeface="Arial" pitchFamily="34" charset="-120"/>
               </a:rPr>
-              <a:t> — a square grid in which every row, every column, and both main diagonals add up to the same total.</a:t>
+              <a:t>A loose set of paper tiles or small cards numbered 1–9 (one set per pair)</a:t>
             </a:r>
             <a:endParaRPr lang="en-US" sz="1200" dirty="0"/>
           </a:p>
@@ -3741,7 +5664,7 @@
               <a:buChar char="•"/>
             </a:pPr>
             <a:r>
-              <a:rPr lang="en-US" sz="1200" i="1" dirty="0">
+              <a:rPr lang="en-US" sz="1200" dirty="0">
                 <a:solidFill>
                   <a:srgbClr val="1C2833"/>
                 </a:solidFill>
@@ -3749,67 +5672,7 @@
                 <a:ea typeface="Arial" pitchFamily="34" charset="-122"/>
                 <a:cs typeface="Arial" pitchFamily="34" charset="-120"/>
               </a:rPr>
-              <a:t>magic constant</a:t>
-            </a:r>
-            <a:pPr algn="l" indent="0" marL="0">
-              <a:lnSpc>
-                <a:spcPts val="1620"/>
-              </a:lnSpc>
-              <a:spcAft>
-                <a:spcPts val="300"/>
-              </a:spcAft>
-              <a:buNone/>
-            </a:pPr>
-            <a:r>
-              <a:rPr lang="en-US" sz="1200" dirty="0">
-                <a:solidFill>
-                  <a:srgbClr val="1C2833"/>
-                </a:solidFill>
-                <a:latin typeface="Arial" pitchFamily="34" charset="0"/>
-                <a:ea typeface="Arial" pitchFamily="34" charset="-122"/>
-                <a:cs typeface="Arial" pitchFamily="34" charset="-120"/>
-              </a:rPr>
-              <a:t> — that common total (sometimes also called the </a:t>
-            </a:r>
-            <a:pPr algn="l" indent="0" marL="0">
-              <a:lnSpc>
-                <a:spcPts val="1620"/>
-              </a:lnSpc>
-              <a:spcAft>
-                <a:spcPts val="300"/>
-              </a:spcAft>
-              <a:buNone/>
-            </a:pPr>
-            <a:r>
-              <a:rPr lang="en-US" sz="1200" i="1" dirty="0">
-                <a:solidFill>
-                  <a:srgbClr val="1C2833"/>
-                </a:solidFill>
-                <a:latin typeface="Arial" pitchFamily="34" charset="0"/>
-                <a:ea typeface="Arial" pitchFamily="34" charset="-122"/>
-                <a:cs typeface="Arial" pitchFamily="34" charset="-120"/>
-              </a:rPr>
-              <a:t>magic sum</a:t>
-            </a:r>
-            <a:pPr algn="l" indent="0" marL="0">
-              <a:lnSpc>
-                <a:spcPts val="1620"/>
-              </a:lnSpc>
-              <a:spcAft>
-                <a:spcPts val="300"/>
-              </a:spcAft>
-              <a:buNone/>
-            </a:pPr>
-            <a:r>
-              <a:rPr lang="en-US" sz="1200" dirty="0">
-                <a:solidFill>
-                  <a:srgbClr val="1C2833"/>
-                </a:solidFill>
-                <a:latin typeface="Arial" pitchFamily="34" charset="0"/>
-                <a:ea typeface="Arial" pitchFamily="34" charset="-122"/>
-                <a:cs typeface="Arial" pitchFamily="34" charset="-120"/>
-              </a:rPr>
-              <a:t>).</a:t>
+              <a:t>Whiteboard</a:t>
             </a:r>
             <a:endParaRPr lang="en-US" sz="1200" dirty="0"/>
           </a:p>
@@ -3967,7 +5830,7 @@
                 <a:ea typeface="Georgia" pitchFamily="34" charset="-122"/>
                 <a:cs typeface="Georgia" pitchFamily="34" charset="-120"/>
               </a:rPr>
-              <a:t>Lesson flow</a:t>
+              <a:t>Vocabulary introduced today</a:t>
             </a:r>
             <a:endParaRPr lang="en-US" sz="1800" dirty="0"/>
           </a:p>
@@ -3976,6 +5839,156 @@
       <p:sp>
         <p:nvSpPr>
           <p:cNvPr id="4" name="Text 2"/>
+          <p:cNvSpPr/>
+          <p:nvPr/>
+        </p:nvSpPr>
+        <p:spPr>
+          <a:xfrm>
+            <a:off x="634901" y="883593"/>
+            <a:ext cx="8102798" cy="525661"/>
+          </a:xfrm>
+          <a:prstGeom prst="rect">
+            <a:avLst/>
+          </a:prstGeom>
+          <a:noFill/>
+          <a:ln/>
+        </p:spPr>
+        <p:txBody>
+          <a:bodyPr wrap="square" lIns="0" tIns="0" rIns="0" bIns="0" rtlCol="0" anchor="t"/>
+          <a:lstStyle/>
+          <a:p>
+            <a:pPr algn="l" marL="342900" indent="-342900">
+              <a:lnSpc>
+                <a:spcPts val="1620"/>
+              </a:lnSpc>
+              <a:spcAft>
+                <a:spcPts val="300"/>
+              </a:spcAft>
+              <a:buSzPct val="100000"/>
+              <a:buChar char="•"/>
+            </a:pPr>
+            <a:r>
+              <a:rPr lang="en-US" sz="1200" i="1" dirty="0">
+                <a:solidFill>
+                  <a:srgbClr val="1C2833"/>
+                </a:solidFill>
+                <a:latin typeface="Arial" pitchFamily="34" charset="0"/>
+                <a:ea typeface="Arial" pitchFamily="34" charset="-122"/>
+                <a:cs typeface="Arial" pitchFamily="34" charset="-120"/>
+              </a:rPr>
+              <a:t>magic square</a:t>
+            </a:r>
+            <a:pPr algn="l" indent="0" marL="0">
+              <a:lnSpc>
+                <a:spcPts val="1620"/>
+              </a:lnSpc>
+              <a:spcAft>
+                <a:spcPts val="300"/>
+              </a:spcAft>
+              <a:buNone/>
+            </a:pPr>
+            <a:r>
+              <a:rPr lang="en-US" sz="1200" dirty="0">
+                <a:solidFill>
+                  <a:srgbClr val="1C2833"/>
+                </a:solidFill>
+                <a:latin typeface="Arial" pitchFamily="34" charset="0"/>
+                <a:ea typeface="Arial" pitchFamily="34" charset="-122"/>
+                <a:cs typeface="Arial" pitchFamily="34" charset="-120"/>
+              </a:rPr>
+              <a:t> — a square grid in which every row, every column, and both main diagonals add up to the same total.</a:t>
+            </a:r>
+            <a:endParaRPr lang="en-US" sz="1200" dirty="0"/>
+          </a:p>
+          <a:p>
+            <a:pPr algn="l" marL="342900" indent="-342900">
+              <a:lnSpc>
+                <a:spcPts val="1620"/>
+              </a:lnSpc>
+              <a:spcAft>
+                <a:spcPts val="300"/>
+              </a:spcAft>
+              <a:buSzPct val="100000"/>
+              <a:buChar char="•"/>
+            </a:pPr>
+            <a:r>
+              <a:rPr lang="en-US" sz="1200" i="1" dirty="0">
+                <a:solidFill>
+                  <a:srgbClr val="1C2833"/>
+                </a:solidFill>
+                <a:latin typeface="Arial" pitchFamily="34" charset="0"/>
+                <a:ea typeface="Arial" pitchFamily="34" charset="-122"/>
+                <a:cs typeface="Arial" pitchFamily="34" charset="-120"/>
+              </a:rPr>
+              <a:t>magic constant</a:t>
+            </a:r>
+            <a:pPr algn="l" indent="0" marL="0">
+              <a:lnSpc>
+                <a:spcPts val="1620"/>
+              </a:lnSpc>
+              <a:spcAft>
+                <a:spcPts val="300"/>
+              </a:spcAft>
+              <a:buNone/>
+            </a:pPr>
+            <a:r>
+              <a:rPr lang="en-US" sz="1200" dirty="0">
+                <a:solidFill>
+                  <a:srgbClr val="1C2833"/>
+                </a:solidFill>
+                <a:latin typeface="Arial" pitchFamily="34" charset="0"/>
+                <a:ea typeface="Arial" pitchFamily="34" charset="-122"/>
+                <a:cs typeface="Arial" pitchFamily="34" charset="-120"/>
+              </a:rPr>
+              <a:t> — that common total (sometimes also called the </a:t>
+            </a:r>
+            <a:pPr algn="l" indent="0" marL="0">
+              <a:lnSpc>
+                <a:spcPts val="1620"/>
+              </a:lnSpc>
+              <a:spcAft>
+                <a:spcPts val="300"/>
+              </a:spcAft>
+              <a:buNone/>
+            </a:pPr>
+            <a:r>
+              <a:rPr lang="en-US" sz="1200" i="1" dirty="0">
+                <a:solidFill>
+                  <a:srgbClr val="1C2833"/>
+                </a:solidFill>
+                <a:latin typeface="Arial" pitchFamily="34" charset="0"/>
+                <a:ea typeface="Arial" pitchFamily="34" charset="-122"/>
+                <a:cs typeface="Arial" pitchFamily="34" charset="-120"/>
+              </a:rPr>
+              <a:t>magic sum</a:t>
+            </a:r>
+            <a:pPr algn="l" indent="0" marL="0">
+              <a:lnSpc>
+                <a:spcPts val="1620"/>
+              </a:lnSpc>
+              <a:spcAft>
+                <a:spcPts val="300"/>
+              </a:spcAft>
+              <a:buNone/>
+            </a:pPr>
+            <a:r>
+              <a:rPr lang="en-US" sz="1200" dirty="0">
+                <a:solidFill>
+                  <a:srgbClr val="1C2833"/>
+                </a:solidFill>
+                <a:latin typeface="Arial" pitchFamily="34" charset="0"/>
+                <a:ea typeface="Arial" pitchFamily="34" charset="-122"/>
+                <a:cs typeface="Arial" pitchFamily="34" charset="-120"/>
+              </a:rPr>
+              <a:t>).</a:t>
+            </a:r>
+            <a:endParaRPr lang="en-US" sz="1200" dirty="0"/>
+          </a:p>
+        </p:txBody>
+      </p:sp>
+      <p:sp>
+        <p:nvSpPr>
+          <p:cNvPr id="5" name="Text 3"/>
           <p:cNvSpPr/>
           <p:nvPr/>
         </p:nvSpPr>
@@ -4125,7 +6138,7 @@
                 <a:ea typeface="Georgia" pitchFamily="34" charset="-122"/>
                 <a:cs typeface="Georgia" pitchFamily="34" charset="-120"/>
               </a:rPr>
-              <a:t>Warm-up (5 min)</a:t>
+              <a:t>Lesson flow</a:t>
             </a:r>
             <a:endParaRPr lang="en-US" sz="1800" dirty="0"/>
           </a:p>
@@ -4134,146 +6147,6 @@
       <p:sp>
         <p:nvSpPr>
           <p:cNvPr id="4" name="Text 2"/>
-          <p:cNvSpPr/>
-          <p:nvPr/>
-        </p:nvSpPr>
-        <p:spPr>
-          <a:xfrm>
-            <a:off x="406301" y="870942"/>
-            <a:ext cx="8498026" cy="853083"/>
-          </a:xfrm>
-          <a:prstGeom prst="rect">
-            <a:avLst/>
-          </a:prstGeom>
-          <a:noFill/>
-          <a:ln/>
-        </p:spPr>
-        <p:txBody>
-          <a:bodyPr wrap="square" lIns="0" tIns="0" rIns="0" bIns="0" rtlCol="0" anchor="t"/>
-          <a:lstStyle/>
-          <a:p>
-            <a:pPr algn="l" indent="0" marL="0">
-              <a:lnSpc>
-                <a:spcPts val="1680"/>
-              </a:lnSpc>
-              <a:spcBef>
-                <a:spcPts val="300"/>
-              </a:spcBef>
-              <a:spcAft>
-                <a:spcPts val="300"/>
-              </a:spcAft>
-              <a:buNone/>
-            </a:pPr>
-            <a:r>
-              <a:rPr lang="en-US" sz="1200" dirty="0">
-                <a:solidFill>
-                  <a:srgbClr val="1C2833"/>
-                </a:solidFill>
-                <a:latin typeface="Arial" pitchFamily="34" charset="0"/>
-                <a:ea typeface="Arial" pitchFamily="34" charset="-122"/>
-                <a:cs typeface="Arial" pitchFamily="34" charset="-120"/>
-              </a:rPr>
-              <a:t>– Teacher draws an empty 3×3 grid on the board. </a:t>
-            </a:r>
-            <a:pPr algn="l" indent="0" marL="0">
-              <a:lnSpc>
-                <a:spcPts val="1680"/>
-              </a:lnSpc>
-              <a:spcBef>
-                <a:spcPts val="300"/>
-              </a:spcBef>
-              <a:spcAft>
-                <a:spcPts val="300"/>
-              </a:spcAft>
-              <a:buNone/>
-            </a:pPr>
-            <a:r>
-              <a:rPr lang="en-US" sz="1200" i="1" dirty="0">
-                <a:solidFill>
-                  <a:srgbClr val="1C2833"/>
-                </a:solidFill>
-                <a:latin typeface="Arial" pitchFamily="34" charset="0"/>
-                <a:ea typeface="Arial" pitchFamily="34" charset="-122"/>
-                <a:cs typeface="Arial" pitchFamily="34" charset="-120"/>
-              </a:rPr>
-              <a:t>"I want to place the numbers 1, 2, 3, 4, 5, 6, 7, 8, 9 in this grid — each number exactly once — so that </a:t>
-            </a:r>
-            <a:pPr algn="l" indent="0" marL="0">
-              <a:lnSpc>
-                <a:spcPts val="1680"/>
-              </a:lnSpc>
-              <a:spcBef>
-                <a:spcPts val="300"/>
-              </a:spcBef>
-              <a:spcAft>
-                <a:spcPts val="300"/>
-              </a:spcAft>
-              <a:buNone/>
-            </a:pPr>
-            <a:r>
-              <a:rPr lang="en-US" sz="1200" b="1" i="1" dirty="0">
-                <a:solidFill>
-                  <a:srgbClr val="1C2833"/>
-                </a:solidFill>
-                <a:latin typeface="Arial" pitchFamily="34" charset="0"/>
-                <a:ea typeface="Arial" pitchFamily="34" charset="-122"/>
-                <a:cs typeface="Arial" pitchFamily="34" charset="-120"/>
-              </a:rPr>
-              <a:t>every row, every column, and both diagonals add up to the same number</a:t>
-            </a:r>
-            <a:pPr algn="l" indent="0" marL="0">
-              <a:lnSpc>
-                <a:spcPts val="1680"/>
-              </a:lnSpc>
-              <a:spcBef>
-                <a:spcPts val="300"/>
-              </a:spcBef>
-              <a:spcAft>
-                <a:spcPts val="300"/>
-              </a:spcAft>
-              <a:buNone/>
-            </a:pPr>
-            <a:r>
-              <a:rPr lang="en-US" sz="1200" i="1" dirty="0">
-                <a:solidFill>
-                  <a:srgbClr val="1C2833"/>
-                </a:solidFill>
-                <a:latin typeface="Arial" pitchFamily="34" charset="0"/>
-                <a:ea typeface="Arial" pitchFamily="34" charset="-122"/>
-                <a:cs typeface="Arial" pitchFamily="34" charset="-120"/>
-              </a:rPr>
-              <a:t>. Can it even be done?"</a:t>
-            </a:r>
-            <a:pPr algn="l" indent="0" marL="0">
-              <a:lnSpc>
-                <a:spcPts val="1680"/>
-              </a:lnSpc>
-              <a:spcBef>
-                <a:spcPts val="300"/>
-              </a:spcBef>
-              <a:spcAft>
-                <a:spcPts val="300"/>
-              </a:spcAft>
-              <a:buNone/>
-            </a:pPr>
-            <a:r>
-              <a:rPr lang="en-US" sz="1200" dirty="0">
-                <a:solidFill>
-                  <a:srgbClr val="1C2833"/>
-                </a:solidFill>
-                <a:latin typeface="Arial" pitchFamily="34" charset="0"/>
-                <a:ea typeface="Arial" pitchFamily="34" charset="-122"/>
-                <a:cs typeface="Arial" pitchFamily="34" charset="-120"/>
-              </a:rPr>
-              <a:t> – Take 2–3 quick guesses. Don't confirm. Write on the side of the board: "Possible? If yes — what's the magic sum?"</a:t>
-            </a:r>
-            <a:endParaRPr lang="en-US" sz="1200" dirty="0"/>
-          </a:p>
-        </p:txBody>
-      </p:sp>
-      <p:sp>
-        <p:nvSpPr>
-          <p:cNvPr id="5" name="Text 3"/>
           <p:cNvSpPr/>
           <p:nvPr/>
         </p:nvSpPr>
@@ -4423,7 +6296,7 @@
                 <a:ea typeface="Georgia" pitchFamily="34" charset="-122"/>
                 <a:cs typeface="Georgia" pitchFamily="34" charset="-120"/>
               </a:rPr>
-              <a:t>Core (20 min)</a:t>
+              <a:t>Warm-up (5 min)</a:t>
             </a:r>
             <a:endParaRPr lang="en-US" sz="1800" dirty="0"/>
           </a:p>
@@ -4438,7 +6311,7 @@
         <p:spPr>
           <a:xfrm>
             <a:off x="634901" y="883593"/>
-            <a:ext cx="8102798" cy="281880"/>
+            <a:ext cx="8102798" cy="937022"/>
           </a:xfrm>
           <a:prstGeom prst="rect">
             <a:avLst/>
@@ -4461,7 +6334,7 @@
               <a:buChar char="•"/>
             </a:pPr>
             <a:r>
-              <a:rPr lang="en-US" sz="1200" b="1" dirty="0">
+              <a:rPr lang="en-US" sz="1200" dirty="0">
                 <a:solidFill>
                   <a:srgbClr val="1C2833"/>
                 </a:solidFill>
@@ -4469,7 +6342,7 @@
                 <a:ea typeface="Arial" pitchFamily="34" charset="-122"/>
                 <a:cs typeface="Arial" pitchFamily="34" charset="-120"/>
               </a:rPr>
-              <a:t>Hand out tiles 1–9 and the blank grids.</a:t>
+              <a:t>Teacher draws an empty 3×3 grid on the board. </a:t>
             </a:r>
             <a:pPr algn="l" indent="0" marL="0">
               <a:lnSpc>
@@ -4481,7 +6354,7 @@
               <a:buNone/>
             </a:pPr>
             <a:r>
-              <a:rPr lang="en-US" sz="1200" dirty="0">
+              <a:rPr lang="en-US" sz="1200" i="1" dirty="0">
                 <a:solidFill>
                   <a:srgbClr val="1C2833"/>
                 </a:solidFill>
@@ -4489,45 +6362,19 @@
                 <a:ea typeface="Arial" pitchFamily="34" charset="-122"/>
                 <a:cs typeface="Arial" pitchFamily="34" charset="-120"/>
               </a:rPr>
-              <a:t> Pairs work for 8 minutes to try to build one.</a:t>
-            </a:r>
-            <a:endParaRPr lang="en-US" sz="1200" dirty="0"/>
-          </a:p>
-        </p:txBody>
-      </p:sp>
-      <p:sp>
-        <p:nvSpPr>
-          <p:cNvPr id="5" name="Text 3"/>
-          <p:cNvSpPr/>
-          <p:nvPr/>
-        </p:nvSpPr>
-        <p:spPr>
-          <a:xfrm>
-            <a:off x="634901" y="1266974"/>
-            <a:ext cx="8102798" cy="487561"/>
-          </a:xfrm>
-          <a:prstGeom prst="rect">
-            <a:avLst/>
-          </a:prstGeom>
-          <a:noFill/>
-          <a:ln/>
-        </p:spPr>
-        <p:txBody>
-          <a:bodyPr wrap="square" lIns="0" tIns="0" rIns="0" bIns="0" rtlCol="0" anchor="t"/>
-          <a:lstStyle/>
-          <a:p>
-            <a:pPr algn="l" marL="342900" indent="-342900">
+              <a:t>"I want to place the numbers 1, 2, 3, 4, 5, 6, 7, 8, 9 in this grid — each number exactly once — so that </a:t>
+            </a:r>
+            <a:pPr algn="l" indent="0" marL="0">
               <a:lnSpc>
                 <a:spcPts val="1620"/>
               </a:lnSpc>
               <a:spcAft>
                 <a:spcPts val="300"/>
               </a:spcAft>
-              <a:buSzPct val="100000"/>
-              <a:buChar char="•"/>
-            </a:pPr>
-            <a:r>
-              <a:rPr lang="en-US" sz="1200" b="1" dirty="0">
+              <a:buNone/>
+            </a:pPr>
+            <a:r>
+              <a:rPr lang="en-US" sz="1200" b="1" i="1" dirty="0">
                 <a:solidFill>
                   <a:srgbClr val="1C2833"/>
                 </a:solidFill>
@@ -4535,7 +6382,7 @@
                 <a:ea typeface="Arial" pitchFamily="34" charset="-122"/>
                 <a:cs typeface="Arial" pitchFamily="34" charset="-120"/>
               </a:rPr>
-              <a:t>Mid-pair check-in (after 4 min):</a:t>
+              <a:t>every row, every column, and both diagonals add up to the same number</a:t>
             </a:r>
             <a:pPr algn="l" indent="0" marL="0">
               <a:lnSpc>
@@ -4547,7 +6394,7 @@
               <a:buNone/>
             </a:pPr>
             <a:r>
-              <a:rPr lang="en-US" sz="1200" dirty="0">
+              <a:rPr lang="en-US" sz="1200" i="1" dirty="0">
                 <a:solidFill>
                   <a:srgbClr val="1C2833"/>
                 </a:solidFill>
@@ -4555,19 +6402,23 @@
                 <a:ea typeface="Arial" pitchFamily="34" charset="-122"/>
                 <a:cs typeface="Arial" pitchFamily="34" charset="-120"/>
               </a:rPr>
-              <a:t> </a:t>
-            </a:r>
-            <a:pPr algn="l" indent="0" marL="0">
+              <a:t>. Can it even be done?"</a:t>
+            </a:r>
+            <a:endParaRPr lang="en-US" sz="1200" dirty="0"/>
+          </a:p>
+          <a:p>
+            <a:pPr algn="l" marL="342900" indent="-342900">
               <a:lnSpc>
                 <a:spcPts val="1620"/>
               </a:lnSpc>
               <a:spcAft>
                 <a:spcPts val="300"/>
               </a:spcAft>
-              <a:buNone/>
-            </a:pPr>
-            <a:r>
-              <a:rPr lang="en-US" sz="1200" i="1" dirty="0">
+              <a:buSzPct val="100000"/>
+              <a:buChar char="•"/>
+            </a:pPr>
+            <a:r>
+              <a:rPr lang="en-US" sz="1200" dirty="0">
                 <a:solidFill>
                   <a:srgbClr val="1C2833"/>
                 </a:solidFill>
@@ -4575,27 +6426,7 @@
                 <a:ea typeface="Arial" pitchFamily="34" charset="-122"/>
                 <a:cs typeface="Arial" pitchFamily="34" charset="-120"/>
               </a:rPr>
-              <a:t>"What number is in the centre of your best attempt so far?"</a:t>
-            </a:r>
-            <a:pPr algn="l" indent="0" marL="0">
-              <a:lnSpc>
-                <a:spcPts val="1620"/>
-              </a:lnSpc>
-              <a:spcAft>
-                <a:spcPts val="300"/>
-              </a:spcAft>
-              <a:buNone/>
-            </a:pPr>
-            <a:r>
-              <a:rPr lang="en-US" sz="1200" dirty="0">
-                <a:solidFill>
-                  <a:srgbClr val="1C2833"/>
-                </a:solidFill>
-                <a:latin typeface="Arial" pitchFamily="34" charset="0"/>
-                <a:ea typeface="Arial" pitchFamily="34" charset="-122"/>
-                <a:cs typeface="Arial" pitchFamily="34" charset="-120"/>
-              </a:rPr>
-              <a:t> Most pairs will have 5 in the centre. Ask why.</a:t>
+              <a:t>Take 2–3 quick guesses. Don't confirm. Write on the side of the board: "Possible? If yes — what's the magic sum?"</a:t>
             </a:r>
             <a:endParaRPr lang="en-US" sz="1200" dirty="0"/>
           </a:p>
@@ -4603,797 +6434,13 @@
       </p:sp>
       <p:sp>
         <p:nvSpPr>
-          <p:cNvPr id="6" name="Text 4"/>
-          <p:cNvSpPr/>
-          <p:nvPr/>
-        </p:nvSpPr>
-        <p:spPr>
-          <a:xfrm>
-            <a:off x="634901" y="1856036"/>
-            <a:ext cx="8102798" cy="281880"/>
-          </a:xfrm>
-          <a:prstGeom prst="rect">
-            <a:avLst/>
-          </a:prstGeom>
-          <a:noFill/>
-          <a:ln/>
-        </p:spPr>
-        <p:txBody>
-          <a:bodyPr wrap="square" lIns="0" tIns="0" rIns="0" bIns="0" rtlCol="0" anchor="t"/>
-          <a:lstStyle/>
-          <a:p>
-            <a:pPr algn="l" marL="342900" indent="-342900">
-              <a:lnSpc>
-                <a:spcPts val="1620"/>
-              </a:lnSpc>
-              <a:spcAft>
-                <a:spcPts val="300"/>
-              </a:spcAft>
-              <a:buSzPct val="100000"/>
-              <a:buChar char="•"/>
-            </a:pPr>
-            <a:r>
-              <a:rPr lang="en-US" sz="1200" b="1" dirty="0">
-                <a:solidFill>
-                  <a:srgbClr val="1C2833"/>
-                </a:solidFill>
-                <a:latin typeface="Arial" pitchFamily="34" charset="0"/>
-                <a:ea typeface="Arial" pitchFamily="34" charset="-122"/>
-                <a:cs typeface="Arial" pitchFamily="34" charset="-120"/>
-              </a:rPr>
-              <a:t>Give a hint, not the answer.</a:t>
-            </a:r>
-            <a:pPr algn="l" indent="0" marL="0">
-              <a:lnSpc>
-                <a:spcPts val="1620"/>
-              </a:lnSpc>
-              <a:spcAft>
-                <a:spcPts val="300"/>
-              </a:spcAft>
-              <a:buNone/>
-            </a:pPr>
-            <a:r>
-              <a:rPr lang="en-US" sz="1200" dirty="0">
-                <a:solidFill>
-                  <a:srgbClr val="1C2833"/>
-                </a:solidFill>
-                <a:latin typeface="Arial" pitchFamily="34" charset="0"/>
-                <a:ea typeface="Arial" pitchFamily="34" charset="-122"/>
-                <a:cs typeface="Arial" pitchFamily="34" charset="-120"/>
-              </a:rPr>
-              <a:t> </a:t>
-            </a:r>
-            <a:pPr algn="l" indent="0" marL="0">
-              <a:lnSpc>
-                <a:spcPts val="1620"/>
-              </a:lnSpc>
-              <a:spcAft>
-                <a:spcPts val="300"/>
-              </a:spcAft>
-              <a:buNone/>
-            </a:pPr>
-            <a:r>
-              <a:rPr lang="en-US" sz="1200" i="1" dirty="0">
-                <a:solidFill>
-                  <a:srgbClr val="1C2833"/>
-                </a:solidFill>
-                <a:latin typeface="Arial" pitchFamily="34" charset="0"/>
-                <a:ea typeface="Arial" pitchFamily="34" charset="-122"/>
-                <a:cs typeface="Arial" pitchFamily="34" charset="-120"/>
-              </a:rPr>
-              <a:t>"The middle number is 5. Each row sums to 15. Now try again."</a:t>
-            </a:r>
-            <a:endParaRPr lang="en-US" sz="1200" dirty="0"/>
-          </a:p>
-        </p:txBody>
-      </p:sp>
-      <p:sp>
-        <p:nvSpPr>
-          <p:cNvPr id="7" name="Text 5"/>
-          <p:cNvSpPr/>
-          <p:nvPr/>
-        </p:nvSpPr>
-        <p:spPr>
-          <a:xfrm>
-            <a:off x="634901" y="2239417"/>
-            <a:ext cx="8102798" cy="281880"/>
-          </a:xfrm>
-          <a:prstGeom prst="rect">
-            <a:avLst/>
-          </a:prstGeom>
-          <a:noFill/>
-          <a:ln/>
-        </p:spPr>
-        <p:txBody>
-          <a:bodyPr wrap="square" lIns="0" tIns="0" rIns="0" bIns="0" rtlCol="0" anchor="t"/>
-          <a:lstStyle/>
-          <a:p>
-            <a:pPr algn="l" marL="342900" indent="-342900">
-              <a:lnSpc>
-                <a:spcPts val="1620"/>
-              </a:lnSpc>
-              <a:spcAft>
-                <a:spcPts val="300"/>
-              </a:spcAft>
-              <a:buSzPct val="100000"/>
-              <a:buChar char="•"/>
-            </a:pPr>
-            <a:r>
-              <a:rPr lang="en-US" sz="1200" b="1" dirty="0">
-                <a:solidFill>
-                  <a:srgbClr val="1C2833"/>
-                </a:solidFill>
-                <a:latin typeface="Arial" pitchFamily="34" charset="0"/>
-                <a:ea typeface="Arial" pitchFamily="34" charset="-122"/>
-                <a:cs typeface="Arial" pitchFamily="34" charset="-120"/>
-              </a:rPr>
-              <a:t>Reveal one valid square</a:t>
-            </a:r>
-            <a:pPr algn="l" indent="0" marL="0">
-              <a:lnSpc>
-                <a:spcPts val="1620"/>
-              </a:lnSpc>
-              <a:spcAft>
-                <a:spcPts val="300"/>
-              </a:spcAft>
-              <a:buNone/>
-            </a:pPr>
-            <a:r>
-              <a:rPr lang="en-US" sz="1200" dirty="0">
-                <a:solidFill>
-                  <a:srgbClr val="1C2833"/>
-                </a:solidFill>
-                <a:latin typeface="Arial" pitchFamily="34" charset="0"/>
-                <a:ea typeface="Arial" pitchFamily="34" charset="-122"/>
-                <a:cs typeface="Arial" pitchFamily="34" charset="-120"/>
-              </a:rPr>
-              <a:t> on the board (after most pairs have struggled — 7–8 min in):</a:t>
-            </a:r>
-            <a:endParaRPr lang="en-US" sz="1200" dirty="0"/>
-          </a:p>
-        </p:txBody>
-      </p:sp>
-      <p:sp>
-        <p:nvSpPr>
-          <p:cNvPr id="8" name="Text 6"/>
-          <p:cNvSpPr/>
-          <p:nvPr/>
-        </p:nvSpPr>
-        <p:spPr>
-          <a:xfrm>
-            <a:off x="406301" y="2622798"/>
-            <a:ext cx="8331398" cy="1126778"/>
-          </a:xfrm>
-          <a:prstGeom prst="rect">
-            <a:avLst/>
-          </a:prstGeom>
-          <a:solidFill>
-            <a:srgbClr val="F4F8F9"/>
-          </a:solidFill>
-          <a:ln/>
-        </p:spPr>
-        <p:txBody>
-          <a:bodyPr wrap="square" rtlCol="0" anchor="ctr"/>
-          <a:lstStyle/>
-          <a:p>
-            <a:pPr indent="0" marL="0">
-              <a:buNone/>
-            </a:pPr>
-            <a:endParaRPr lang="en-US" dirty="0"/>
-          </a:p>
-        </p:txBody>
-      </p:sp>
-      <p:sp>
-        <p:nvSpPr>
-          <p:cNvPr id="9" name="Shape 7"/>
-          <p:cNvSpPr/>
-          <p:nvPr/>
-        </p:nvSpPr>
-        <p:spPr>
-          <a:xfrm>
-            <a:off x="430113" y="2622798"/>
-            <a:ext cx="0" cy="1126778"/>
-          </a:xfrm>
-          <a:prstGeom prst="line">
-            <a:avLst/>
-          </a:prstGeom>
-          <a:noFill/>
-          <a:ln w="47625">
-            <a:solidFill>
-              <a:srgbClr val="277884"/>
-            </a:solidFill>
-            <a:prstDash val="solid"/>
-          </a:ln>
-        </p:spPr>
-      </p:sp>
-      <p:sp>
-        <p:nvSpPr>
-          <p:cNvPr id="10" name="Text 8"/>
-          <p:cNvSpPr/>
-          <p:nvPr/>
-        </p:nvSpPr>
-        <p:spPr>
-          <a:xfrm>
-            <a:off x="631627" y="2749748"/>
-            <a:ext cx="8086939" cy="174575"/>
-          </a:xfrm>
-          <a:prstGeom prst="rect">
-            <a:avLst/>
-          </a:prstGeom>
-          <a:noFill/>
-          <a:ln/>
-        </p:spPr>
-        <p:txBody>
-          <a:bodyPr wrap="square" lIns="0" tIns="0" rIns="0" bIns="0" rtlCol="0" anchor="t"/>
-          <a:lstStyle/>
-          <a:p>
-            <a:pPr algn="l" indent="0" marL="0">
-              <a:lnSpc>
-                <a:spcPts val="1375"/>
-              </a:lnSpc>
-              <a:buNone/>
-            </a:pPr>
-            <a:r>
-              <a:rPr lang="en-US" sz="1100" dirty="0">
-                <a:solidFill>
-                  <a:srgbClr val="1C2833"/>
-                </a:solidFill>
-                <a:latin typeface="Courier New" pitchFamily="34" charset="0"/>
-                <a:ea typeface="Courier New" pitchFamily="34" charset="-122"/>
-                <a:cs typeface="Courier New" pitchFamily="34" charset="-120"/>
-              </a:rPr>
-              <a:t>2 | 7 | 6</a:t>
-            </a:r>
-            <a:endParaRPr lang="en-US" sz="1100" dirty="0"/>
-          </a:p>
-        </p:txBody>
-      </p:sp>
-      <p:sp>
-        <p:nvSpPr>
-          <p:cNvPr id="11" name="Text 9"/>
-          <p:cNvSpPr/>
-          <p:nvPr/>
-        </p:nvSpPr>
-        <p:spPr>
-          <a:xfrm>
-            <a:off x="631627" y="2924324"/>
-            <a:ext cx="8086939" cy="174575"/>
-          </a:xfrm>
-          <a:prstGeom prst="rect">
-            <a:avLst/>
-          </a:prstGeom>
-          <a:noFill/>
-          <a:ln/>
-        </p:spPr>
-        <p:txBody>
-          <a:bodyPr wrap="square" lIns="0" tIns="0" rIns="0" bIns="0" rtlCol="0" anchor="t"/>
-          <a:lstStyle/>
-          <a:p>
-            <a:pPr algn="l" indent="0" marL="0">
-              <a:lnSpc>
-                <a:spcPts val="1375"/>
-              </a:lnSpc>
-              <a:buNone/>
-            </a:pPr>
-            <a:r>
-              <a:rPr lang="en-US" sz="1100" dirty="0">
-                <a:solidFill>
-                  <a:srgbClr val="1C2833"/>
-                </a:solidFill>
-                <a:latin typeface="Courier New" pitchFamily="34" charset="0"/>
-                <a:ea typeface="Courier New" pitchFamily="34" charset="-122"/>
-                <a:cs typeface="Courier New" pitchFamily="34" charset="-120"/>
-              </a:rPr>
-              <a:t>---------</a:t>
-            </a:r>
-            <a:endParaRPr lang="en-US" sz="1100" dirty="0"/>
-          </a:p>
-        </p:txBody>
-      </p:sp>
-      <p:sp>
-        <p:nvSpPr>
-          <p:cNvPr id="12" name="Text 10"/>
-          <p:cNvSpPr/>
-          <p:nvPr/>
-        </p:nvSpPr>
-        <p:spPr>
-          <a:xfrm>
-            <a:off x="631627" y="3098899"/>
-            <a:ext cx="8086939" cy="174575"/>
-          </a:xfrm>
-          <a:prstGeom prst="rect">
-            <a:avLst/>
-          </a:prstGeom>
-          <a:noFill/>
-          <a:ln/>
-        </p:spPr>
-        <p:txBody>
-          <a:bodyPr wrap="square" lIns="0" tIns="0" rIns="0" bIns="0" rtlCol="0" anchor="t"/>
-          <a:lstStyle/>
-          <a:p>
-            <a:pPr algn="l" indent="0" marL="0">
-              <a:lnSpc>
-                <a:spcPts val="1375"/>
-              </a:lnSpc>
-              <a:buNone/>
-            </a:pPr>
-            <a:r>
-              <a:rPr lang="en-US" sz="1100" dirty="0">
-                <a:solidFill>
-                  <a:srgbClr val="1C2833"/>
-                </a:solidFill>
-                <a:latin typeface="Courier New" pitchFamily="34" charset="0"/>
-                <a:ea typeface="Courier New" pitchFamily="34" charset="-122"/>
-                <a:cs typeface="Courier New" pitchFamily="34" charset="-120"/>
-              </a:rPr>
-              <a:t>9 | 5 | 1</a:t>
-            </a:r>
-            <a:endParaRPr lang="en-US" sz="1100" dirty="0"/>
-          </a:p>
-        </p:txBody>
-      </p:sp>
-      <p:sp>
-        <p:nvSpPr>
-          <p:cNvPr id="13" name="Text 11"/>
-          <p:cNvSpPr/>
-          <p:nvPr/>
-        </p:nvSpPr>
-        <p:spPr>
-          <a:xfrm>
-            <a:off x="631627" y="3273475"/>
-            <a:ext cx="8086939" cy="174575"/>
-          </a:xfrm>
-          <a:prstGeom prst="rect">
-            <a:avLst/>
-          </a:prstGeom>
-          <a:noFill/>
-          <a:ln/>
-        </p:spPr>
-        <p:txBody>
-          <a:bodyPr wrap="square" lIns="0" tIns="0" rIns="0" bIns="0" rtlCol="0" anchor="t"/>
-          <a:lstStyle/>
-          <a:p>
-            <a:pPr algn="l" indent="0" marL="0">
-              <a:lnSpc>
-                <a:spcPts val="1375"/>
-              </a:lnSpc>
-              <a:buNone/>
-            </a:pPr>
-            <a:r>
-              <a:rPr lang="en-US" sz="1100" dirty="0">
-                <a:solidFill>
-                  <a:srgbClr val="1C2833"/>
-                </a:solidFill>
-                <a:latin typeface="Courier New" pitchFamily="34" charset="0"/>
-                <a:ea typeface="Courier New" pitchFamily="34" charset="-122"/>
-                <a:cs typeface="Courier New" pitchFamily="34" charset="-120"/>
-              </a:rPr>
-              <a:t>---------</a:t>
-            </a:r>
-            <a:endParaRPr lang="en-US" sz="1100" dirty="0"/>
-          </a:p>
-        </p:txBody>
-      </p:sp>
-      <p:sp>
-        <p:nvSpPr>
-          <p:cNvPr id="14" name="Text 12"/>
-          <p:cNvSpPr/>
-          <p:nvPr/>
-        </p:nvSpPr>
-        <p:spPr>
-          <a:xfrm>
-            <a:off x="631627" y="3448050"/>
-            <a:ext cx="8086939" cy="174575"/>
-          </a:xfrm>
-          <a:prstGeom prst="rect">
-            <a:avLst/>
-          </a:prstGeom>
-          <a:noFill/>
-          <a:ln/>
-        </p:spPr>
-        <p:txBody>
-          <a:bodyPr wrap="square" lIns="0" tIns="0" rIns="0" bIns="0" rtlCol="0" anchor="t"/>
-          <a:lstStyle/>
-          <a:p>
-            <a:pPr algn="l" indent="0" marL="0">
-              <a:lnSpc>
-                <a:spcPts val="1375"/>
-              </a:lnSpc>
-              <a:buNone/>
-            </a:pPr>
-            <a:r>
-              <a:rPr lang="en-US" sz="1100" dirty="0">
-                <a:solidFill>
-                  <a:srgbClr val="1C2833"/>
-                </a:solidFill>
-                <a:latin typeface="Courier New" pitchFamily="34" charset="0"/>
-                <a:ea typeface="Courier New" pitchFamily="34" charset="-122"/>
-                <a:cs typeface="Courier New" pitchFamily="34" charset="-120"/>
-              </a:rPr>
-              <a:t>4 | 3 | 8</a:t>
-            </a:r>
-            <a:endParaRPr lang="en-US" sz="1100" dirty="0"/>
-          </a:p>
-        </p:txBody>
-      </p:sp>
-      <p:sp>
-        <p:nvSpPr>
-          <p:cNvPr id="15" name="Text 13"/>
-          <p:cNvSpPr/>
-          <p:nvPr/>
-        </p:nvSpPr>
-        <p:spPr>
-          <a:xfrm>
-            <a:off x="406301" y="3838426"/>
-            <a:ext cx="8498026" cy="426541"/>
-          </a:xfrm>
-          <a:prstGeom prst="rect">
-            <a:avLst/>
-          </a:prstGeom>
-          <a:noFill/>
-          <a:ln/>
-        </p:spPr>
-        <p:txBody>
-          <a:bodyPr wrap="square" lIns="0" tIns="0" rIns="0" bIns="0" rtlCol="0" anchor="t"/>
-          <a:lstStyle/>
-          <a:p>
-            <a:pPr algn="l" indent="0" marL="0">
-              <a:lnSpc>
-                <a:spcPts val="1680"/>
-              </a:lnSpc>
-              <a:spcBef>
-                <a:spcPts val="300"/>
-              </a:spcBef>
-              <a:spcAft>
-                <a:spcPts val="300"/>
-              </a:spcAft>
-              <a:buNone/>
-            </a:pPr>
-            <a:r>
-              <a:rPr lang="en-US" sz="1200" dirty="0">
-                <a:solidFill>
-                  <a:srgbClr val="1C2833"/>
-                </a:solidFill>
-                <a:latin typeface="Arial" pitchFamily="34" charset="0"/>
-                <a:ea typeface="Arial" pitchFamily="34" charset="-122"/>
-                <a:cs typeface="Arial" pitchFamily="34" charset="-120"/>
-              </a:rPr>
-              <a:t>Verify together: each row → 15. Each column → 15. Both diagonals → 15. </a:t>
-            </a:r>
-            <a:pPr algn="l" indent="0" marL="0">
-              <a:lnSpc>
-                <a:spcPts val="1680"/>
-              </a:lnSpc>
-              <a:spcBef>
-                <a:spcPts val="300"/>
-              </a:spcBef>
-              <a:spcAft>
-                <a:spcPts val="300"/>
-              </a:spcAft>
-              <a:buNone/>
-            </a:pPr>
-            <a:r>
-              <a:rPr lang="en-US" sz="1200" i="1" dirty="0">
-                <a:solidFill>
-                  <a:srgbClr val="1C2833"/>
-                </a:solidFill>
-                <a:latin typeface="Arial" pitchFamily="34" charset="0"/>
-                <a:ea typeface="Arial" pitchFamily="34" charset="-122"/>
-                <a:cs typeface="Arial" pitchFamily="34" charset="-120"/>
-              </a:rPr>
-              <a:t>"That sum 15 is called the</a:t>
-            </a:r>
-            <a:pPr algn="l" indent="0" marL="0">
-              <a:lnSpc>
-                <a:spcPts val="1680"/>
-              </a:lnSpc>
-              <a:spcBef>
-                <a:spcPts val="300"/>
-              </a:spcBef>
-              <a:spcAft>
-                <a:spcPts val="300"/>
-              </a:spcAft>
-              <a:buNone/>
-            </a:pPr>
-            <a:r>
-              <a:rPr lang="en-US" sz="1200" dirty="0">
-                <a:solidFill>
-                  <a:srgbClr val="1C2833"/>
-                </a:solidFill>
-                <a:latin typeface="Arial" pitchFamily="34" charset="0"/>
-                <a:ea typeface="Arial" pitchFamily="34" charset="-122"/>
-                <a:cs typeface="Arial" pitchFamily="34" charset="-120"/>
-              </a:rPr>
-              <a:t> magic constant </a:t>
-            </a:r>
-            <a:pPr algn="l" indent="0" marL="0">
-              <a:lnSpc>
-                <a:spcPts val="1680"/>
-              </a:lnSpc>
-              <a:spcBef>
-                <a:spcPts val="300"/>
-              </a:spcBef>
-              <a:spcAft>
-                <a:spcPts val="300"/>
-              </a:spcAft>
-              <a:buNone/>
-            </a:pPr>
-            <a:r>
-              <a:rPr lang="en-US" sz="1200" i="1" dirty="0">
-                <a:solidFill>
-                  <a:srgbClr val="1C2833"/>
-                </a:solidFill>
-                <a:latin typeface="Arial" pitchFamily="34" charset="0"/>
-                <a:ea typeface="Arial" pitchFamily="34" charset="-122"/>
-                <a:cs typeface="Arial" pitchFamily="34" charset="-120"/>
-              </a:rPr>
-              <a:t>of this square."</a:t>
-            </a:r>
-            <a:endParaRPr lang="en-US" sz="1200" dirty="0"/>
-          </a:p>
-        </p:txBody>
-      </p:sp>
-      <p:sp>
-        <p:nvSpPr>
-          <p:cNvPr id="16" name="Text 14"/>
-          <p:cNvSpPr/>
-          <p:nvPr/>
-        </p:nvSpPr>
-        <p:spPr>
-          <a:xfrm>
-            <a:off x="634901" y="4353818"/>
-            <a:ext cx="8102798" cy="281880"/>
-          </a:xfrm>
-          <a:prstGeom prst="rect">
-            <a:avLst/>
-          </a:prstGeom>
-          <a:noFill/>
-          <a:ln/>
-        </p:spPr>
-        <p:txBody>
-          <a:bodyPr wrap="square" lIns="0" tIns="0" rIns="0" bIns="0" rtlCol="0" anchor="t"/>
-          <a:lstStyle/>
-          <a:p>
-            <a:pPr algn="l" marL="342900" indent="-342900">
-              <a:lnSpc>
-                <a:spcPts val="1620"/>
-              </a:lnSpc>
-              <a:spcAft>
-                <a:spcPts val="300"/>
-              </a:spcAft>
-              <a:buSzPct val="100000"/>
-              <a:buChar char="•"/>
-            </a:pPr>
-            <a:r>
-              <a:rPr lang="en-US" sz="1200" b="1" dirty="0">
-                <a:solidFill>
-                  <a:srgbClr val="1C2833"/>
-                </a:solidFill>
-                <a:latin typeface="Arial" pitchFamily="34" charset="0"/>
-                <a:ea typeface="Arial" pitchFamily="34" charset="-122"/>
-                <a:cs typeface="Arial" pitchFamily="34" charset="-120"/>
-              </a:rPr>
-              <a:t>Definition on the board.</a:t>
-            </a:r>
-            <a:pPr algn="l" indent="0" marL="0">
-              <a:lnSpc>
-                <a:spcPts val="1620"/>
-              </a:lnSpc>
-              <a:spcAft>
-                <a:spcPts val="300"/>
-              </a:spcAft>
-              <a:buNone/>
-            </a:pPr>
-            <a:r>
-              <a:rPr lang="en-US" sz="1200" dirty="0">
-                <a:solidFill>
-                  <a:srgbClr val="1C2833"/>
-                </a:solidFill>
-                <a:latin typeface="Arial" pitchFamily="34" charset="0"/>
-                <a:ea typeface="Arial" pitchFamily="34" charset="-122"/>
-                <a:cs typeface="Arial" pitchFamily="34" charset="-120"/>
-              </a:rPr>
-              <a:t> Students copy this into their notebooks:</a:t>
-            </a:r>
-            <a:endParaRPr lang="en-US" sz="1200" dirty="0"/>
-          </a:p>
-        </p:txBody>
-      </p:sp>
-      <p:sp>
-        <p:nvSpPr>
-          <p:cNvPr id="17" name="Text 15"/>
-          <p:cNvSpPr/>
-          <p:nvPr/>
-        </p:nvSpPr>
-        <p:spPr>
-          <a:xfrm>
-            <a:off x="406301" y="4724549"/>
-            <a:ext cx="8498026" cy="426541"/>
-          </a:xfrm>
-          <a:prstGeom prst="rect">
-            <a:avLst/>
-          </a:prstGeom>
-          <a:noFill/>
-          <a:ln/>
-        </p:spPr>
-        <p:txBody>
-          <a:bodyPr wrap="square" lIns="0" tIns="0" rIns="0" bIns="0" rtlCol="0" anchor="t"/>
-          <a:lstStyle/>
-          <a:p>
-            <a:pPr algn="l" indent="0" marL="0">
-              <a:lnSpc>
-                <a:spcPts val="1680"/>
-              </a:lnSpc>
-              <a:spcBef>
-                <a:spcPts val="300"/>
-              </a:spcBef>
-              <a:spcAft>
-                <a:spcPts val="300"/>
-              </a:spcAft>
-              <a:buNone/>
-            </a:pPr>
-            <a:r>
-              <a:rPr lang="en-US" sz="1200" dirty="0">
-                <a:solidFill>
-                  <a:srgbClr val="1C2833"/>
-                </a:solidFill>
-                <a:latin typeface="Arial" pitchFamily="34" charset="0"/>
-                <a:ea typeface="Arial" pitchFamily="34" charset="-122"/>
-                <a:cs typeface="Arial" pitchFamily="34" charset="-120"/>
-              </a:rPr>
-              <a:t>&gt; A </a:t>
-            </a:r>
-            <a:pPr algn="l" indent="0" marL="0">
-              <a:lnSpc>
-                <a:spcPts val="1680"/>
-              </a:lnSpc>
-              <a:spcBef>
-                <a:spcPts val="300"/>
-              </a:spcBef>
-              <a:spcAft>
-                <a:spcPts val="300"/>
-              </a:spcAft>
-              <a:buNone/>
-            </a:pPr>
-            <a:r>
-              <a:rPr lang="en-US" sz="1200" b="1" dirty="0">
-                <a:solidFill>
-                  <a:srgbClr val="1C2833"/>
-                </a:solidFill>
-                <a:latin typeface="Arial" pitchFamily="34" charset="0"/>
-                <a:ea typeface="Arial" pitchFamily="34" charset="-122"/>
-                <a:cs typeface="Arial" pitchFamily="34" charset="-120"/>
-              </a:rPr>
-              <a:t>magic square</a:t>
-            </a:r>
-            <a:pPr algn="l" indent="0" marL="0">
-              <a:lnSpc>
-                <a:spcPts val="1680"/>
-              </a:lnSpc>
-              <a:spcBef>
-                <a:spcPts val="300"/>
-              </a:spcBef>
-              <a:spcAft>
-                <a:spcPts val="300"/>
-              </a:spcAft>
-              <a:buNone/>
-            </a:pPr>
-            <a:r>
-              <a:rPr lang="en-US" sz="1200" dirty="0">
-                <a:solidFill>
-                  <a:srgbClr val="1C2833"/>
-                </a:solidFill>
-                <a:latin typeface="Arial" pitchFamily="34" charset="0"/>
-                <a:ea typeface="Arial" pitchFamily="34" charset="-122"/>
-                <a:cs typeface="Arial" pitchFamily="34" charset="-120"/>
-              </a:rPr>
-              <a:t> is an </a:t>
-            </a:r>
-            <a:pPr algn="l" indent="0" marL="0">
-              <a:lnSpc>
-                <a:spcPts val="1680"/>
-              </a:lnSpc>
-              <a:spcBef>
-                <a:spcPts val="300"/>
-              </a:spcBef>
-              <a:spcAft>
-                <a:spcPts val="300"/>
-              </a:spcAft>
-              <a:buNone/>
-            </a:pPr>
-            <a:r>
-              <a:rPr lang="en-US" sz="1200" i="1" dirty="0">
-                <a:solidFill>
-                  <a:srgbClr val="1C2833"/>
-                </a:solidFill>
-                <a:latin typeface="Arial" pitchFamily="34" charset="0"/>
-                <a:ea typeface="Arial" pitchFamily="34" charset="-122"/>
-                <a:cs typeface="Arial" pitchFamily="34" charset="-120"/>
-              </a:rPr>
-              <a:t>n × n</a:t>
-            </a:r>
-            <a:pPr algn="l" indent="0" marL="0">
-              <a:lnSpc>
-                <a:spcPts val="1680"/>
-              </a:lnSpc>
-              <a:spcBef>
-                <a:spcPts val="300"/>
-              </a:spcBef>
-              <a:spcAft>
-                <a:spcPts val="300"/>
-              </a:spcAft>
-              <a:buNone/>
-            </a:pPr>
-            <a:r>
-              <a:rPr lang="en-US" sz="1200" dirty="0">
-                <a:solidFill>
-                  <a:srgbClr val="1C2833"/>
-                </a:solidFill>
-                <a:latin typeface="Arial" pitchFamily="34" charset="0"/>
-                <a:ea typeface="Arial" pitchFamily="34" charset="-122"/>
-                <a:cs typeface="Arial" pitchFamily="34" charset="-120"/>
-              </a:rPr>
-              <a:t> grid filled with distinct numbers such that every row, every column, and both main diagonals add up to the same total — the </a:t>
-            </a:r>
-            <a:pPr algn="l" indent="0" marL="0">
-              <a:lnSpc>
-                <a:spcPts val="1680"/>
-              </a:lnSpc>
-              <a:spcBef>
-                <a:spcPts val="300"/>
-              </a:spcBef>
-              <a:spcAft>
-                <a:spcPts val="300"/>
-              </a:spcAft>
-              <a:buNone/>
-            </a:pPr>
-            <a:r>
-              <a:rPr lang="en-US" sz="1200" b="1" dirty="0">
-                <a:solidFill>
-                  <a:srgbClr val="1C2833"/>
-                </a:solidFill>
-                <a:latin typeface="Arial" pitchFamily="34" charset="0"/>
-                <a:ea typeface="Arial" pitchFamily="34" charset="-122"/>
-                <a:cs typeface="Arial" pitchFamily="34" charset="-120"/>
-              </a:rPr>
-              <a:t>magic constant</a:t>
-            </a:r>
-            <a:pPr algn="l" indent="0" marL="0">
-              <a:lnSpc>
-                <a:spcPts val="1680"/>
-              </a:lnSpc>
-              <a:spcBef>
-                <a:spcPts val="300"/>
-              </a:spcBef>
-              <a:spcAft>
-                <a:spcPts val="300"/>
-              </a:spcAft>
-              <a:buNone/>
-            </a:pPr>
-            <a:r>
-              <a:rPr lang="en-US" sz="1200" dirty="0">
-                <a:solidFill>
-                  <a:srgbClr val="1C2833"/>
-                </a:solidFill>
-                <a:latin typeface="Arial" pitchFamily="34" charset="0"/>
-                <a:ea typeface="Arial" pitchFamily="34" charset="-122"/>
-                <a:cs typeface="Arial" pitchFamily="34" charset="-120"/>
-              </a:rPr>
-              <a:t>.</a:t>
-            </a:r>
-            <a:endParaRPr lang="en-US" sz="1200" dirty="0"/>
-          </a:p>
-        </p:txBody>
-      </p:sp>
-      <p:sp>
-        <p:nvSpPr>
-          <p:cNvPr id="18" name="Text 16"/>
-          <p:cNvSpPr/>
-          <p:nvPr/>
-        </p:nvSpPr>
-        <p:spPr>
-          <a:xfrm>
-            <a:off x="406301" y="5303490"/>
+          <p:cNvPr id="5" name="Text 3"/>
+          <p:cNvSpPr/>
+          <p:nvPr/>
+        </p:nvSpPr>
+        <p:spPr>
+          <a:xfrm>
+            <a:off x="406301" y="4434929"/>
             <a:ext cx="8498026" cy="213271"/>
           </a:xfrm>
           <a:prstGeom prst="rect">
@@ -5537,7 +6584,7 @@
                 <a:ea typeface="Georgia" pitchFamily="34" charset="-122"/>
                 <a:cs typeface="Georgia" pitchFamily="34" charset="-120"/>
               </a:rPr>
-              <a:t>Activity (15 min) — Verify and vary</a:t>
+              <a:t>Core (20 min)</a:t>
             </a:r>
             <a:endParaRPr lang="en-US" sz="1800" dirty="0"/>
           </a:p>
@@ -5552,7 +6599,7 @@
         <p:spPr>
           <a:xfrm>
             <a:off x="634901" y="883593"/>
-            <a:ext cx="8102798" cy="1142702"/>
+            <a:ext cx="8102798" cy="281880"/>
           </a:xfrm>
           <a:prstGeom prst="rect">
             <a:avLst/>
@@ -5583,7 +6630,7 @@
                 <a:ea typeface="Arial" pitchFamily="34" charset="-122"/>
                 <a:cs typeface="Arial" pitchFamily="34" charset="-120"/>
               </a:rPr>
-              <a:t>Part A (5 min):</a:t>
+              <a:t>Hand out tiles 1–9 and the blank grids.</a:t>
             </a:r>
             <a:pPr algn="l" indent="0" marL="0">
               <a:lnSpc>
@@ -5603,10 +6650,32 @@
                 <a:ea typeface="Arial" pitchFamily="34" charset="-122"/>
                 <a:cs typeface="Arial" pitchFamily="34" charset="-120"/>
               </a:rPr>
-              <a:t> Each student picks any 3 lines (rows, columns, or diagonals) of the revealed square and verifies the sum on their notebook.</a:t>
+              <a:t> Pairs work for 8 minutes to try to build one.</a:t>
             </a:r>
             <a:endParaRPr lang="en-US" sz="1200" dirty="0"/>
           </a:p>
+        </p:txBody>
+      </p:sp>
+      <p:sp>
+        <p:nvSpPr>
+          <p:cNvPr id="5" name="Text 3"/>
+          <p:cNvSpPr/>
+          <p:nvPr/>
+        </p:nvSpPr>
+        <p:spPr>
+          <a:xfrm>
+            <a:off x="634901" y="1266974"/>
+            <a:ext cx="8102798" cy="487561"/>
+          </a:xfrm>
+          <a:prstGeom prst="rect">
+            <a:avLst/>
+          </a:prstGeom>
+          <a:noFill/>
+          <a:ln/>
+        </p:spPr>
+        <p:txBody>
+          <a:bodyPr wrap="square" lIns="0" tIns="0" rIns="0" bIns="0" rtlCol="0" anchor="t"/>
+          <a:lstStyle/>
           <a:p>
             <a:pPr algn="l" marL="342900" indent="-342900">
               <a:lnSpc>
@@ -5627,7 +6696,7 @@
                 <a:ea typeface="Arial" pitchFamily="34" charset="-122"/>
                 <a:cs typeface="Arial" pitchFamily="34" charset="-120"/>
               </a:rPr>
-              <a:t>Part B (10 min):</a:t>
+              <a:t>Mid-pair check-in (after 4 min):</a:t>
             </a:r>
             <a:pPr algn="l" indent="0" marL="0">
               <a:lnSpc>
@@ -5647,7 +6716,7 @@
                 <a:ea typeface="Arial" pitchFamily="34" charset="-122"/>
                 <a:cs typeface="Arial" pitchFamily="34" charset="-120"/>
               </a:rPr>
-              <a:t> Pairs try to make a </a:t>
+              <a:t> </a:t>
             </a:r>
             <a:pPr algn="l" indent="0" marL="0">
               <a:lnSpc>
@@ -5667,7 +6736,7 @@
                 <a:ea typeface="Arial" pitchFamily="34" charset="-122"/>
                 <a:cs typeface="Arial" pitchFamily="34" charset="-120"/>
               </a:rPr>
-              <a:t>different</a:t>
+              <a:t>"What number is in the centre of your best attempt so far?"</a:t>
             </a:r>
             <a:pPr algn="l" indent="0" marL="0">
               <a:lnSpc>
@@ -5687,7 +6756,7 @@
                 <a:ea typeface="Arial" pitchFamily="34" charset="-122"/>
                 <a:cs typeface="Arial" pitchFamily="34" charset="-120"/>
               </a:rPr>
-              <a:t> 3×3 magic square using 1–9. (Without saying so, you are previewing Day 3 — they will discover symmetries.) Most will produce rotations or reflections of the same square. That is the discovery, not the failure.</a:t>
+              <a:t> Most pairs will have 5 in the centre. Ask why.</a:t>
             </a:r>
             <a:endParaRPr lang="en-US" sz="1200" dirty="0"/>
           </a:p>
@@ -5695,7 +6764,93 @@
       </p:sp>
       <p:sp>
         <p:nvSpPr>
-          <p:cNvPr id="5" name="Text 3"/>
+          <p:cNvPr id="6" name="Text 4"/>
+          <p:cNvSpPr/>
+          <p:nvPr/>
+        </p:nvSpPr>
+        <p:spPr>
+          <a:xfrm>
+            <a:off x="634901" y="1856036"/>
+            <a:ext cx="8102798" cy="281880"/>
+          </a:xfrm>
+          <a:prstGeom prst="rect">
+            <a:avLst/>
+          </a:prstGeom>
+          <a:noFill/>
+          <a:ln/>
+        </p:spPr>
+        <p:txBody>
+          <a:bodyPr wrap="square" lIns="0" tIns="0" rIns="0" bIns="0" rtlCol="0" anchor="t"/>
+          <a:lstStyle/>
+          <a:p>
+            <a:pPr algn="l" marL="342900" indent="-342900">
+              <a:lnSpc>
+                <a:spcPts val="1620"/>
+              </a:lnSpc>
+              <a:spcAft>
+                <a:spcPts val="300"/>
+              </a:spcAft>
+              <a:buSzPct val="100000"/>
+              <a:buChar char="•"/>
+            </a:pPr>
+            <a:r>
+              <a:rPr lang="en-US" sz="1200" b="1" dirty="0">
+                <a:solidFill>
+                  <a:srgbClr val="1C2833"/>
+                </a:solidFill>
+                <a:latin typeface="Arial" pitchFamily="34" charset="0"/>
+                <a:ea typeface="Arial" pitchFamily="34" charset="-122"/>
+                <a:cs typeface="Arial" pitchFamily="34" charset="-120"/>
+              </a:rPr>
+              <a:t>Give a hint, not the answer.</a:t>
+            </a:r>
+            <a:pPr algn="l" indent="0" marL="0">
+              <a:lnSpc>
+                <a:spcPts val="1620"/>
+              </a:lnSpc>
+              <a:spcAft>
+                <a:spcPts val="300"/>
+              </a:spcAft>
+              <a:buNone/>
+            </a:pPr>
+            <a:r>
+              <a:rPr lang="en-US" sz="1200" dirty="0">
+                <a:solidFill>
+                  <a:srgbClr val="1C2833"/>
+                </a:solidFill>
+                <a:latin typeface="Arial" pitchFamily="34" charset="0"/>
+                <a:ea typeface="Arial" pitchFamily="34" charset="-122"/>
+                <a:cs typeface="Arial" pitchFamily="34" charset="-120"/>
+              </a:rPr>
+              <a:t> </a:t>
+            </a:r>
+            <a:pPr algn="l" indent="0" marL="0">
+              <a:lnSpc>
+                <a:spcPts val="1620"/>
+              </a:lnSpc>
+              <a:spcAft>
+                <a:spcPts val="300"/>
+              </a:spcAft>
+              <a:buNone/>
+            </a:pPr>
+            <a:r>
+              <a:rPr lang="en-US" sz="1200" i="1" dirty="0">
+                <a:solidFill>
+                  <a:srgbClr val="1C2833"/>
+                </a:solidFill>
+                <a:latin typeface="Arial" pitchFamily="34" charset="0"/>
+                <a:ea typeface="Arial" pitchFamily="34" charset="-122"/>
+                <a:cs typeface="Arial" pitchFamily="34" charset="-120"/>
+              </a:rPr>
+              <a:t>"The middle number is 5. Each row sums to 15. Now try again."</a:t>
+            </a:r>
+            <a:endParaRPr lang="en-US" sz="1200" dirty="0"/>
+          </a:p>
+        </p:txBody>
+      </p:sp>
+      <p:sp>
+        <p:nvSpPr>
+          <p:cNvPr id="7" name="Text 5"/>
           <p:cNvSpPr/>
           <p:nvPr/>
         </p:nvSpPr>
@@ -5845,7 +7000,7 @@
                 <a:ea typeface="Georgia" pitchFamily="34" charset="-122"/>
                 <a:cs typeface="Georgia" pitchFamily="34" charset="-120"/>
               </a:rPr>
-              <a:t>Wrap-up (5 min)</a:t>
+              <a:t>Core (20 min) (cont.)</a:t>
             </a:r>
             <a:endParaRPr lang="en-US" sz="1800" dirty="0"/>
           </a:p>
@@ -5859,8 +7014,8 @@
         </p:nvSpPr>
         <p:spPr>
           <a:xfrm>
-            <a:off x="406301" y="870942"/>
-            <a:ext cx="8498026" cy="639812"/>
+            <a:off x="634901" y="883593"/>
+            <a:ext cx="8102798" cy="281880"/>
           </a:xfrm>
           <a:prstGeom prst="rect">
             <a:avLst/>
@@ -5872,20 +7027,18 @@
           <a:bodyPr wrap="square" lIns="0" tIns="0" rIns="0" bIns="0" rtlCol="0" anchor="t"/>
           <a:lstStyle/>
           <a:p>
-            <a:pPr algn="l" indent="0" marL="0">
-              <a:lnSpc>
-                <a:spcPts val="1680"/>
-              </a:lnSpc>
-              <a:spcBef>
-                <a:spcPts val="300"/>
-              </a:spcBef>
-              <a:spcAft>
-                <a:spcPts val="300"/>
-              </a:spcAft>
-              <a:buNone/>
-            </a:pPr>
-            <a:r>
-              <a:rPr lang="en-US" sz="1200" dirty="0">
+            <a:pPr algn="l" marL="342900" indent="-342900">
+              <a:lnSpc>
+                <a:spcPts val="1620"/>
+              </a:lnSpc>
+              <a:spcAft>
+                <a:spcPts val="300"/>
+              </a:spcAft>
+              <a:buSzPct val="100000"/>
+              <a:buChar char="•"/>
+            </a:pPr>
+            <a:r>
+              <a:rPr lang="en-US" sz="1200" b="1" dirty="0">
                 <a:solidFill>
                   <a:srgbClr val="1C2833"/>
                 </a:solidFill>
@@ -5893,22 +7046,19 @@
                 <a:ea typeface="Arial" pitchFamily="34" charset="-122"/>
                 <a:cs typeface="Arial" pitchFamily="34" charset="-120"/>
               </a:rPr>
-              <a:t>– Quick show of hands: "Did anyone find a square that is genuinely different from the one on the board?" (Most will say yes; some of those "different" squares will be rotations.) – Preview Day 2: </a:t>
-            </a:r>
-            <a:pPr algn="l" indent="0" marL="0">
-              <a:lnSpc>
-                <a:spcPts val="1680"/>
-              </a:lnSpc>
-              <a:spcBef>
-                <a:spcPts val="300"/>
-              </a:spcBef>
-              <a:spcAft>
-                <a:spcPts val="300"/>
-              </a:spcAft>
-              <a:buNone/>
-            </a:pPr>
-            <a:r>
-              <a:rPr lang="en-US" sz="1200" i="1" dirty="0">
+              <a:t>Reveal one valid square</a:t>
+            </a:r>
+            <a:pPr algn="l" indent="0" marL="0">
+              <a:lnSpc>
+                <a:spcPts val="1620"/>
+              </a:lnSpc>
+              <a:spcAft>
+                <a:spcPts val="300"/>
+              </a:spcAft>
+              <a:buNone/>
+            </a:pPr>
+            <a:r>
+              <a:rPr lang="en-US" sz="1200" dirty="0">
                 <a:solidFill>
                   <a:srgbClr val="1C2833"/>
                 </a:solidFill>
@@ -5916,7 +7066,7 @@
                 <a:ea typeface="Arial" pitchFamily="34" charset="-122"/>
                 <a:cs typeface="Arial" pitchFamily="34" charset="-120"/>
               </a:rPr>
-              <a:t>"Tomorrow we'll prove why the magic constant is exactly 15 for the 3×3 with 1–9. We won't guess — we'll derive it."</a:t>
+              <a:t> on the board (after most pairs have struggled — 7–8 min in):</a:t>
             </a:r>
             <a:endParaRPr lang="en-US" sz="1200" dirty="0"/>
           </a:p>
@@ -6074,7 +7224,7 @@
                 <a:ea typeface="Georgia" pitchFamily="34" charset="-122"/>
                 <a:cs typeface="Georgia" pitchFamily="34" charset="-120"/>
               </a:rPr>
-              <a:t>Student-facing content</a:t>
+              <a:t>Core (20 min) (cont.)</a:t>
             </a:r>
             <a:endParaRPr lang="en-US" sz="1800" dirty="0"/>
           </a:p>
@@ -6089,7 +7239,7 @@
         <p:spPr>
           <a:xfrm>
             <a:off x="406301" y="883593"/>
-            <a:ext cx="8331398" cy="1900238"/>
+            <a:ext cx="8331398" cy="1126778"/>
           </a:xfrm>
           <a:prstGeom prst="rect">
             <a:avLst/>
@@ -6118,16 +7268,16 @@
         </p:nvSpPr>
         <p:spPr>
           <a:xfrm>
-            <a:off x="434876" y="883593"/>
-            <a:ext cx="0" cy="1900238"/>
+            <a:off x="430113" y="883593"/>
+            <a:ext cx="0" cy="1126778"/>
           </a:xfrm>
           <a:prstGeom prst="line">
             <a:avLst/>
           </a:prstGeom>
           <a:noFill/>
-          <a:ln w="57150">
+          <a:ln w="47625">
             <a:solidFill>
-              <a:srgbClr val="FE4447"/>
+              <a:srgbClr val="277884"/>
             </a:solidFill>
             <a:prstDash val="solid"/>
           </a:ln>
@@ -6141,8 +7291,8 @@
         </p:nvSpPr>
         <p:spPr>
           <a:xfrm>
-            <a:off x="692051" y="1074093"/>
-            <a:ext cx="7973389" cy="461963"/>
+            <a:off x="631627" y="1010543"/>
+            <a:ext cx="8086939" cy="174575"/>
           </a:xfrm>
           <a:prstGeom prst="rect">
             <a:avLst/>
@@ -6156,7 +7306,217 @@
           <a:p>
             <a:pPr algn="l" indent="0" marL="0">
               <a:lnSpc>
-                <a:spcPts val="1820"/>
+                <a:spcPts val="1375"/>
+              </a:lnSpc>
+              <a:buNone/>
+            </a:pPr>
+            <a:r>
+              <a:rPr lang="en-US" sz="1100" dirty="0">
+                <a:solidFill>
+                  <a:srgbClr val="1C2833"/>
+                </a:solidFill>
+                <a:latin typeface="Courier New" pitchFamily="34" charset="0"/>
+                <a:ea typeface="Courier New" pitchFamily="34" charset="-122"/>
+                <a:cs typeface="Courier New" pitchFamily="34" charset="-120"/>
+              </a:rPr>
+              <a:t>2 | 7 | 6</a:t>
+            </a:r>
+            <a:endParaRPr lang="en-US" sz="1100" dirty="0"/>
+          </a:p>
+        </p:txBody>
+      </p:sp>
+      <p:sp>
+        <p:nvSpPr>
+          <p:cNvPr id="7" name="Text 5"/>
+          <p:cNvSpPr/>
+          <p:nvPr/>
+        </p:nvSpPr>
+        <p:spPr>
+          <a:xfrm>
+            <a:off x="631627" y="1185118"/>
+            <a:ext cx="8086939" cy="174575"/>
+          </a:xfrm>
+          <a:prstGeom prst="rect">
+            <a:avLst/>
+          </a:prstGeom>
+          <a:noFill/>
+          <a:ln/>
+        </p:spPr>
+        <p:txBody>
+          <a:bodyPr wrap="square" lIns="0" tIns="0" rIns="0" bIns="0" rtlCol="0" anchor="t"/>
+          <a:lstStyle/>
+          <a:p>
+            <a:pPr algn="l" indent="0" marL="0">
+              <a:lnSpc>
+                <a:spcPts val="1375"/>
+              </a:lnSpc>
+              <a:buNone/>
+            </a:pPr>
+            <a:r>
+              <a:rPr lang="en-US" sz="1100" dirty="0">
+                <a:solidFill>
+                  <a:srgbClr val="1C2833"/>
+                </a:solidFill>
+                <a:latin typeface="Courier New" pitchFamily="34" charset="0"/>
+                <a:ea typeface="Courier New" pitchFamily="34" charset="-122"/>
+                <a:cs typeface="Courier New" pitchFamily="34" charset="-120"/>
+              </a:rPr>
+              <a:t>---------</a:t>
+            </a:r>
+            <a:endParaRPr lang="en-US" sz="1100" dirty="0"/>
+          </a:p>
+        </p:txBody>
+      </p:sp>
+      <p:sp>
+        <p:nvSpPr>
+          <p:cNvPr id="8" name="Text 6"/>
+          <p:cNvSpPr/>
+          <p:nvPr/>
+        </p:nvSpPr>
+        <p:spPr>
+          <a:xfrm>
+            <a:off x="631627" y="1359694"/>
+            <a:ext cx="8086939" cy="174575"/>
+          </a:xfrm>
+          <a:prstGeom prst="rect">
+            <a:avLst/>
+          </a:prstGeom>
+          <a:noFill/>
+          <a:ln/>
+        </p:spPr>
+        <p:txBody>
+          <a:bodyPr wrap="square" lIns="0" tIns="0" rIns="0" bIns="0" rtlCol="0" anchor="t"/>
+          <a:lstStyle/>
+          <a:p>
+            <a:pPr algn="l" indent="0" marL="0">
+              <a:lnSpc>
+                <a:spcPts val="1375"/>
+              </a:lnSpc>
+              <a:buNone/>
+            </a:pPr>
+            <a:r>
+              <a:rPr lang="en-US" sz="1100" dirty="0">
+                <a:solidFill>
+                  <a:srgbClr val="1C2833"/>
+                </a:solidFill>
+                <a:latin typeface="Courier New" pitchFamily="34" charset="0"/>
+                <a:ea typeface="Courier New" pitchFamily="34" charset="-122"/>
+                <a:cs typeface="Courier New" pitchFamily="34" charset="-120"/>
+              </a:rPr>
+              <a:t>9 | 5 | 1</a:t>
+            </a:r>
+            <a:endParaRPr lang="en-US" sz="1100" dirty="0"/>
+          </a:p>
+        </p:txBody>
+      </p:sp>
+      <p:sp>
+        <p:nvSpPr>
+          <p:cNvPr id="9" name="Text 7"/>
+          <p:cNvSpPr/>
+          <p:nvPr/>
+        </p:nvSpPr>
+        <p:spPr>
+          <a:xfrm>
+            <a:off x="631627" y="1534269"/>
+            <a:ext cx="8086939" cy="174575"/>
+          </a:xfrm>
+          <a:prstGeom prst="rect">
+            <a:avLst/>
+          </a:prstGeom>
+          <a:noFill/>
+          <a:ln/>
+        </p:spPr>
+        <p:txBody>
+          <a:bodyPr wrap="square" lIns="0" tIns="0" rIns="0" bIns="0" rtlCol="0" anchor="t"/>
+          <a:lstStyle/>
+          <a:p>
+            <a:pPr algn="l" indent="0" marL="0">
+              <a:lnSpc>
+                <a:spcPts val="1375"/>
+              </a:lnSpc>
+              <a:buNone/>
+            </a:pPr>
+            <a:r>
+              <a:rPr lang="en-US" sz="1100" dirty="0">
+                <a:solidFill>
+                  <a:srgbClr val="1C2833"/>
+                </a:solidFill>
+                <a:latin typeface="Courier New" pitchFamily="34" charset="0"/>
+                <a:ea typeface="Courier New" pitchFamily="34" charset="-122"/>
+                <a:cs typeface="Courier New" pitchFamily="34" charset="-120"/>
+              </a:rPr>
+              <a:t>---------</a:t>
+            </a:r>
+            <a:endParaRPr lang="en-US" sz="1100" dirty="0"/>
+          </a:p>
+        </p:txBody>
+      </p:sp>
+      <p:sp>
+        <p:nvSpPr>
+          <p:cNvPr id="10" name="Text 8"/>
+          <p:cNvSpPr/>
+          <p:nvPr/>
+        </p:nvSpPr>
+        <p:spPr>
+          <a:xfrm>
+            <a:off x="631627" y="1708845"/>
+            <a:ext cx="8086939" cy="174575"/>
+          </a:xfrm>
+          <a:prstGeom prst="rect">
+            <a:avLst/>
+          </a:prstGeom>
+          <a:noFill/>
+          <a:ln/>
+        </p:spPr>
+        <p:txBody>
+          <a:bodyPr wrap="square" lIns="0" tIns="0" rIns="0" bIns="0" rtlCol="0" anchor="t"/>
+          <a:lstStyle/>
+          <a:p>
+            <a:pPr algn="l" indent="0" marL="0">
+              <a:lnSpc>
+                <a:spcPts val="1375"/>
+              </a:lnSpc>
+              <a:buNone/>
+            </a:pPr>
+            <a:r>
+              <a:rPr lang="en-US" sz="1100" dirty="0">
+                <a:solidFill>
+                  <a:srgbClr val="1C2833"/>
+                </a:solidFill>
+                <a:latin typeface="Courier New" pitchFamily="34" charset="0"/>
+                <a:ea typeface="Courier New" pitchFamily="34" charset="-122"/>
+                <a:cs typeface="Courier New" pitchFamily="34" charset="-120"/>
+              </a:rPr>
+              <a:t>4 | 3 | 8</a:t>
+            </a:r>
+            <a:endParaRPr lang="en-US" sz="1100" dirty="0"/>
+          </a:p>
+        </p:txBody>
+      </p:sp>
+      <p:sp>
+        <p:nvSpPr>
+          <p:cNvPr id="11" name="Text 9"/>
+          <p:cNvSpPr/>
+          <p:nvPr/>
+        </p:nvSpPr>
+        <p:spPr>
+          <a:xfrm>
+            <a:off x="406301" y="2099221"/>
+            <a:ext cx="8498026" cy="426541"/>
+          </a:xfrm>
+          <a:prstGeom prst="rect">
+            <a:avLst/>
+          </a:prstGeom>
+          <a:noFill/>
+          <a:ln/>
+        </p:spPr>
+        <p:txBody>
+          <a:bodyPr wrap="square" lIns="0" tIns="0" rIns="0" bIns="0" rtlCol="0" anchor="t"/>
+          <a:lstStyle/>
+          <a:p>
+            <a:pPr algn="l" indent="0" marL="0">
+              <a:lnSpc>
+                <a:spcPts val="1680"/>
               </a:lnSpc>
               <a:spcBef>
                 <a:spcPts val="300"/>
@@ -6167,19 +7527,19 @@
               <a:buNone/>
             </a:pPr>
             <a:r>
-              <a:rPr lang="en-US" sz="1300" b="1" i="1" dirty="0">
-                <a:solidFill>
-                  <a:srgbClr val="1C2833"/>
-                </a:solidFill>
-                <a:latin typeface="Georgia" pitchFamily="34" charset="0"/>
-                <a:ea typeface="Georgia" pitchFamily="34" charset="-122"/>
-                <a:cs typeface="Georgia" pitchFamily="34" charset="-120"/>
-              </a:rPr>
-              <a:t>A magic square</a:t>
-            </a:r>
-            <a:pPr algn="l" indent="0" marL="0">
-              <a:lnSpc>
-                <a:spcPts val="1820"/>
+              <a:rPr lang="en-US" sz="1200" dirty="0">
+                <a:solidFill>
+                  <a:srgbClr val="1C2833"/>
+                </a:solidFill>
+                <a:latin typeface="Arial" pitchFamily="34" charset="0"/>
+                <a:ea typeface="Arial" pitchFamily="34" charset="-122"/>
+                <a:cs typeface="Arial" pitchFamily="34" charset="-120"/>
+              </a:rPr>
+              <a:t>Verify together: each row → 15. Each column → 15. Both diagonals → 15. </a:t>
+            </a:r>
+            <a:pPr algn="l" indent="0" marL="0">
+              <a:lnSpc>
+                <a:spcPts val="1680"/>
               </a:lnSpc>
               <a:spcBef>
                 <a:spcPts val="300"/>
@@ -6190,19 +7550,19 @@
               <a:buNone/>
             </a:pPr>
             <a:r>
-              <a:rPr lang="en-US" sz="1300" dirty="0">
-                <a:solidFill>
-                  <a:srgbClr val="1C2833"/>
-                </a:solidFill>
-                <a:latin typeface="Georgia" pitchFamily="34" charset="0"/>
-                <a:ea typeface="Georgia" pitchFamily="34" charset="-122"/>
-                <a:cs typeface="Georgia" pitchFamily="34" charset="-120"/>
-              </a:rPr>
-              <a:t> is an </a:t>
-            </a:r>
-            <a:pPr algn="l" indent="0" marL="0">
-              <a:lnSpc>
-                <a:spcPts val="1820"/>
+              <a:rPr lang="en-US" sz="1200" i="1" dirty="0">
+                <a:solidFill>
+                  <a:srgbClr val="1C2833"/>
+                </a:solidFill>
+                <a:latin typeface="Arial" pitchFamily="34" charset="0"/>
+                <a:ea typeface="Arial" pitchFamily="34" charset="-122"/>
+                <a:cs typeface="Arial" pitchFamily="34" charset="-120"/>
+              </a:rPr>
+              <a:t>"That sum 15 is called the</a:t>
+            </a:r>
+            <a:pPr algn="l" indent="0" marL="0">
+              <a:lnSpc>
+                <a:spcPts val="1680"/>
               </a:lnSpc>
               <a:spcBef>
                 <a:spcPts val="300"/>
@@ -6213,19 +7573,19 @@
               <a:buNone/>
             </a:pPr>
             <a:r>
-              <a:rPr lang="en-US" sz="1300" i="1" dirty="0">
-                <a:solidFill>
-                  <a:srgbClr val="1C2833"/>
-                </a:solidFill>
-                <a:latin typeface="Georgia" pitchFamily="34" charset="0"/>
-                <a:ea typeface="Georgia" pitchFamily="34" charset="-122"/>
-                <a:cs typeface="Georgia" pitchFamily="34" charset="-120"/>
-              </a:rPr>
-              <a:t>n × n</a:t>
-            </a:r>
-            <a:pPr algn="l" indent="0" marL="0">
-              <a:lnSpc>
-                <a:spcPts val="1820"/>
+              <a:rPr lang="en-US" sz="1200" dirty="0">
+                <a:solidFill>
+                  <a:srgbClr val="1C2833"/>
+                </a:solidFill>
+                <a:latin typeface="Arial" pitchFamily="34" charset="0"/>
+                <a:ea typeface="Arial" pitchFamily="34" charset="-122"/>
+                <a:cs typeface="Arial" pitchFamily="34" charset="-120"/>
+              </a:rPr>
+              <a:t> magic constant </a:t>
+            </a:r>
+            <a:pPr algn="l" indent="0" marL="0">
+              <a:lnSpc>
+                <a:spcPts val="1680"/>
               </a:lnSpc>
               <a:spcBef>
                 <a:spcPts val="300"/>
@@ -6236,305 +7596,23 @@
               <a:buNone/>
             </a:pPr>
             <a:r>
-              <a:rPr lang="en-US" sz="1300" dirty="0">
-                <a:solidFill>
-                  <a:srgbClr val="1C2833"/>
-                </a:solidFill>
-                <a:latin typeface="Georgia" pitchFamily="34" charset="0"/>
-                <a:ea typeface="Georgia" pitchFamily="34" charset="-122"/>
-                <a:cs typeface="Georgia" pitchFamily="34" charset="-120"/>
-              </a:rPr>
-              <a:t> grid of distinct numbers where every row, every column, and both main diagonals add up to the same total — the </a:t>
-            </a:r>
-            <a:pPr algn="l" indent="0" marL="0">
-              <a:lnSpc>
-                <a:spcPts val="1820"/>
-              </a:lnSpc>
-              <a:spcBef>
-                <a:spcPts val="300"/>
-              </a:spcBef>
-              <a:spcAft>
-                <a:spcPts val="300"/>
-              </a:spcAft>
-              <a:buNone/>
-            </a:pPr>
-            <a:r>
-              <a:rPr lang="en-US" sz="1300" b="1" i="1" dirty="0">
-                <a:solidFill>
-                  <a:srgbClr val="1C2833"/>
-                </a:solidFill>
-                <a:latin typeface="Georgia" pitchFamily="34" charset="0"/>
-                <a:ea typeface="Georgia" pitchFamily="34" charset="-122"/>
-                <a:cs typeface="Georgia" pitchFamily="34" charset="-120"/>
-              </a:rPr>
-              <a:t>magic constant</a:t>
-            </a:r>
-            <a:pPr algn="l" indent="0" marL="0">
-              <a:lnSpc>
-                <a:spcPts val="1820"/>
-              </a:lnSpc>
-              <a:spcBef>
-                <a:spcPts val="300"/>
-              </a:spcBef>
-              <a:spcAft>
-                <a:spcPts val="300"/>
-              </a:spcAft>
-              <a:buNone/>
-            </a:pPr>
-            <a:r>
-              <a:rPr lang="en-US" sz="1300" dirty="0">
-                <a:solidFill>
-                  <a:srgbClr val="1C2833"/>
-                </a:solidFill>
-                <a:latin typeface="Georgia" pitchFamily="34" charset="0"/>
-                <a:ea typeface="Georgia" pitchFamily="34" charset="-122"/>
-                <a:cs typeface="Georgia" pitchFamily="34" charset="-120"/>
-              </a:rPr>
-              <a:t>.</a:t>
-            </a:r>
-            <a:endParaRPr lang="en-US" sz="1300" dirty="0"/>
-          </a:p>
-        </p:txBody>
-      </p:sp>
-      <p:sp>
-        <p:nvSpPr>
-          <p:cNvPr id="7" name="Text 5"/>
-          <p:cNvSpPr/>
-          <p:nvPr/>
-        </p:nvSpPr>
-        <p:spPr>
-          <a:xfrm>
-            <a:off x="692051" y="1574155"/>
-            <a:ext cx="7973389" cy="230981"/>
-          </a:xfrm>
-          <a:prstGeom prst="rect">
-            <a:avLst/>
-          </a:prstGeom>
-          <a:noFill/>
-          <a:ln/>
-        </p:spPr>
-        <p:txBody>
-          <a:bodyPr wrap="square" lIns="0" tIns="0" rIns="0" bIns="0" rtlCol="0" anchor="t"/>
-          <a:lstStyle/>
-          <a:p>
-            <a:pPr algn="l" indent="0" marL="0">
-              <a:lnSpc>
-                <a:spcPts val="1820"/>
-              </a:lnSpc>
-              <a:spcBef>
-                <a:spcPts val="300"/>
-              </a:spcBef>
-              <a:spcAft>
-                <a:spcPts val="300"/>
-              </a:spcAft>
-              <a:buNone/>
-            </a:pPr>
-            <a:r>
-              <a:rPr lang="en-US" sz="1300" dirty="0">
-                <a:solidFill>
-                  <a:srgbClr val="1C2833"/>
-                </a:solidFill>
-                <a:latin typeface="Georgia" pitchFamily="34" charset="0"/>
-                <a:ea typeface="Georgia" pitchFamily="34" charset="-122"/>
-                <a:cs typeface="Georgia" pitchFamily="34" charset="-120"/>
-              </a:rPr>
-              <a:t>The simplest non-trivial magic square uses the numbers 1 to 9 in a 3×3 grid. Its magic constant is </a:t>
-            </a:r>
-            <a:pPr algn="l" indent="0" marL="0">
-              <a:lnSpc>
-                <a:spcPts val="1820"/>
-              </a:lnSpc>
-              <a:spcBef>
-                <a:spcPts val="300"/>
-              </a:spcBef>
-              <a:spcAft>
-                <a:spcPts val="300"/>
-              </a:spcAft>
-              <a:buNone/>
-            </a:pPr>
-            <a:r>
-              <a:rPr lang="en-US" sz="1300" b="1" i="1" dirty="0">
-                <a:solidFill>
-                  <a:srgbClr val="1C2833"/>
-                </a:solidFill>
-                <a:latin typeface="Georgia" pitchFamily="34" charset="0"/>
-                <a:ea typeface="Georgia" pitchFamily="34" charset="-122"/>
-                <a:cs typeface="Georgia" pitchFamily="34" charset="-120"/>
-              </a:rPr>
-              <a:t>15</a:t>
-            </a:r>
-            <a:pPr algn="l" indent="0" marL="0">
-              <a:lnSpc>
-                <a:spcPts val="1820"/>
-              </a:lnSpc>
-              <a:spcBef>
-                <a:spcPts val="300"/>
-              </a:spcBef>
-              <a:spcAft>
-                <a:spcPts val="300"/>
-              </a:spcAft>
-              <a:buNone/>
-            </a:pPr>
-            <a:r>
-              <a:rPr lang="en-US" sz="1300" dirty="0">
-                <a:solidFill>
-                  <a:srgbClr val="1C2833"/>
-                </a:solidFill>
-                <a:latin typeface="Georgia" pitchFamily="34" charset="0"/>
-                <a:ea typeface="Georgia" pitchFamily="34" charset="-122"/>
-                <a:cs typeface="Georgia" pitchFamily="34" charset="-120"/>
-              </a:rPr>
-              <a:t>.</a:t>
-            </a:r>
-            <a:endParaRPr lang="en-US" sz="1300" dirty="0"/>
-          </a:p>
-        </p:txBody>
-      </p:sp>
-      <p:sp>
-        <p:nvSpPr>
-          <p:cNvPr id="8" name="Text 6"/>
-          <p:cNvSpPr/>
-          <p:nvPr/>
-        </p:nvSpPr>
-        <p:spPr>
-          <a:xfrm>
-            <a:off x="692051" y="1843236"/>
-            <a:ext cx="7973389" cy="250031"/>
-          </a:xfrm>
-          <a:prstGeom prst="rect">
-            <a:avLst/>
-          </a:prstGeom>
-          <a:noFill/>
-          <a:ln/>
-        </p:spPr>
-        <p:txBody>
-          <a:bodyPr wrap="square" lIns="0" tIns="0" rIns="0" bIns="0" rtlCol="0" anchor="t"/>
-          <a:lstStyle/>
-          <a:p>
-            <a:pPr algn="l" indent="0" marL="0">
-              <a:lnSpc>
-                <a:spcPts val="1820"/>
-              </a:lnSpc>
-              <a:spcBef>
-                <a:spcPts val="300"/>
-              </a:spcBef>
-              <a:spcAft>
-                <a:spcPts val="300"/>
-              </a:spcAft>
-              <a:buNone/>
-            </a:pPr>
-            <a:r>
-              <a:rPr lang="en-US" sz="1300" dirty="0">
-                <a:solidFill>
-                  <a:srgbClr val="1C2833"/>
-                </a:solidFill>
-                <a:latin typeface="Georgia" pitchFamily="34" charset="0"/>
-                <a:ea typeface="Georgia" pitchFamily="34" charset="-122"/>
-                <a:cs typeface="Georgia" pitchFamily="34" charset="-120"/>
-              </a:rPr>
-              <a:t>``</a:t>
-            </a:r>
-            <a:pPr algn="l" indent="0" marL="0">
-              <a:lnSpc>
-                <a:spcPts val="1820"/>
-              </a:lnSpc>
-              <a:spcBef>
-                <a:spcPts val="300"/>
-              </a:spcBef>
-              <a:spcAft>
-                <a:spcPts val="300"/>
-              </a:spcAft>
-              <a:buNone/>
-            </a:pPr>
-            <a:r>
-              <a:rPr lang="en-US" sz="1300" i="1" dirty="0">
-                <a:solidFill>
-                  <a:srgbClr val="1C2833"/>
-                </a:solidFill>
-                <a:latin typeface="Georgia" pitchFamily="34" charset="0"/>
-                <a:ea typeface="Georgia" pitchFamily="34" charset="-122"/>
-                <a:cs typeface="Georgia" pitchFamily="34" charset="-120"/>
-              </a:rPr>
-              <a:t> 2 | 7 | 6 --------- 9 | 5 | 1 --------- 4 | 3 | 8</a:t>
-            </a:r>
-            <a:pPr algn="l" indent="0" marL="0">
-              <a:lnSpc>
-                <a:spcPts val="1820"/>
-              </a:lnSpc>
-              <a:spcBef>
-                <a:spcPts val="300"/>
-              </a:spcBef>
-              <a:spcAft>
-                <a:spcPts val="300"/>
-              </a:spcAft>
-              <a:buNone/>
-            </a:pPr>
-            <a:r>
-              <a:rPr lang="en-US" sz="1300" dirty="0">
-                <a:solidFill>
-                  <a:srgbClr val="1C2833"/>
-                </a:solidFill>
-                <a:latin typeface="Georgia" pitchFamily="34" charset="0"/>
-                <a:ea typeface="Georgia" pitchFamily="34" charset="-122"/>
-                <a:cs typeface="Georgia" pitchFamily="34" charset="-120"/>
-              </a:rPr>
-              <a:t>``</a:t>
-            </a:r>
-            <a:endParaRPr lang="en-US" sz="1300" dirty="0"/>
-          </a:p>
-        </p:txBody>
-      </p:sp>
-      <p:sp>
-        <p:nvSpPr>
-          <p:cNvPr id="9" name="Text 7"/>
-          <p:cNvSpPr/>
-          <p:nvPr/>
-        </p:nvSpPr>
-        <p:spPr>
-          <a:xfrm>
-            <a:off x="692051" y="2131368"/>
-            <a:ext cx="7973389" cy="461963"/>
-          </a:xfrm>
-          <a:prstGeom prst="rect">
-            <a:avLst/>
-          </a:prstGeom>
-          <a:noFill/>
-          <a:ln/>
-        </p:spPr>
-        <p:txBody>
-          <a:bodyPr wrap="square" lIns="0" tIns="0" rIns="0" bIns="0" rtlCol="0" anchor="t"/>
-          <a:lstStyle/>
-          <a:p>
-            <a:pPr algn="l" indent="0" marL="0">
-              <a:lnSpc>
-                <a:spcPts val="1820"/>
-              </a:lnSpc>
-              <a:spcBef>
-                <a:spcPts val="300"/>
-              </a:spcBef>
-              <a:spcAft>
-                <a:spcPts val="300"/>
-              </a:spcAft>
-              <a:buNone/>
-            </a:pPr>
-            <a:r>
-              <a:rPr lang="en-US" sz="1300" i="1" dirty="0">
-                <a:solidFill>
-                  <a:srgbClr val="1C2833"/>
-                </a:solidFill>
-                <a:latin typeface="Georgia" pitchFamily="34" charset="0"/>
-                <a:ea typeface="Georgia" pitchFamily="34" charset="-122"/>
-                <a:cs typeface="Georgia" pitchFamily="34" charset="-120"/>
-              </a:rPr>
-              <a:t>Verify: rows → 2+7+6=15, 9+5+1=15, 4+3+8=15. Columns → 2+9+4=15, 7+5+3=15, 6+1+8=15. Diagonals → 2+5+8=15, 6+5+4=15.</a:t>
-            </a:r>
-            <a:endParaRPr lang="en-US" sz="1300" dirty="0"/>
-          </a:p>
-        </p:txBody>
-      </p:sp>
-      <p:sp>
-        <p:nvSpPr>
-          <p:cNvPr id="10" name="Text 8"/>
+              <a:rPr lang="en-US" sz="1200" i="1" dirty="0">
+                <a:solidFill>
+                  <a:srgbClr val="1C2833"/>
+                </a:solidFill>
+                <a:latin typeface="Arial" pitchFamily="34" charset="0"/>
+                <a:ea typeface="Arial" pitchFamily="34" charset="-122"/>
+                <a:cs typeface="Arial" pitchFamily="34" charset="-120"/>
+              </a:rPr>
+              <a:t>of this square."</a:t>
+            </a:r>
+            <a:endParaRPr lang="en-US" sz="1200" dirty="0"/>
+          </a:p>
+        </p:txBody>
+      </p:sp>
+      <p:sp>
+        <p:nvSpPr>
+          <p:cNvPr id="12" name="Text 10"/>
           <p:cNvSpPr/>
           <p:nvPr/>
         </p:nvSpPr>
